--- a/dist/초5/수학/분수의성질/초5_수학_분수의성질_01_크기가같은분수.pptx
+++ b/dist/초5/수학/분수의성질/초5_수학_분수의성질_01_크기가같은분수.pptx
@@ -121,13 +121,13 @@
   <p:extLst>
     <p:ext uri="{521415D9-36F7-43E2-AB2F-B90AF26B5E84}">
       <p14:sectionLst xmlns:p14="http://schemas.microsoft.com/office/powerpoint/2010/main">
-        <p14:section name="도입" id="{3392c311-f360-2450-13ce-48404082fcb8}">
+        <p14:section name="도입" id="{c1c1eae5-3917-9795-3a01-c07b05295f25}">
           <p14:sldIdLst>
             <p14:sldId id="256"/>
             <p14:sldId id="257"/>
           </p14:sldIdLst>
         </p14:section>
-        <p14:section name="개념" id="{17ffe846-93fd-d72c-0662-083c75345c74}">
+        <p14:section name="개념" id="{fd08365d-eddf-17b2-f788-586c70d40053}">
           <p14:sldIdLst>
             <p14:sldId id="258"/>
             <p14:sldId id="259"/>
@@ -137,25 +137,25 @@
             <p14:sldId id="263"/>
           </p14:sldIdLst>
         </p14:section>
-        <p14:section name="연습" id="{05c27608-3d6b-a1ba-3df9-a2df67a40330}">
+        <p14:section name="연습" id="{abd959de-ede5-8501-13d7-5c4415e5c8ad}">
           <p14:sldIdLst>
             <p14:sldId id="264"/>
             <p14:sldId id="265"/>
           </p14:sldIdLst>
         </p14:section>
-        <p14:section name="확인" id="{827b7a2f-3c79-13b0-b7e4-4874ccb624e9}">
+        <p14:section name="확인" id="{4d2e0aea-23e2-f890-6889-7f0cbf9eaa11}">
           <p14:sldIdLst>
             <p14:sldId id="266"/>
             <p14:sldId id="267"/>
             <p14:sldId id="268"/>
           </p14:sldIdLst>
         </p14:section>
-        <p14:section name="정리" id="{dae2bc96-073e-0523-3e93-8f29b77d0bac}">
+        <p14:section name="정리" id="{328f3bb1-cf7c-b706-4dae-e1f2b3545a88}">
           <p14:sldIdLst>
             <p14:sldId id="269"/>
           </p14:sldIdLst>
         </p14:section>
-        <p14:section name="보충" id="{02008299-67b5-67e2-e72e-8425dfbe0461}">
+        <p14:section name="보충" id="{5bf1baeb-27b5-7b5e-c46b-9f6f43901485}">
           <p14:sldIdLst>
             <p14:sldId id="270"/>
           </p14:sldIdLst>
@@ -2111,7 +2111,7 @@
         <p:spPr>
           <a:xfrm>
             <a:off x="731520" y="640080"/>
-            <a:ext cx="6583680" cy="1188720"/>
+            <a:ext cx="6675120" cy="1188720"/>
           </a:xfrm>
           <a:prstGeom prst="rect">
             <a:avLst/>
@@ -2124,7 +2124,7 @@
           <a:lstStyle>
             <a:lvl1pPr algn="l" indent="0" marL="0">
               <a:buNone/>
-              <a:defRPr lang="en-US" sz="4800" b="1" dirty="0">
+              <a:defRPr lang="en-US" sz="4600" b="1" dirty="0">
                 <a:solidFill>
                   <a:srgbClr val="FFFFFF"/>
                 </a:solidFill>
@@ -2138,7 +2138,7 @@
             <a:pPr algn="l" indent="0" marL="0">
               <a:buNone/>
             </a:pPr>
-            <a:endParaRPr lang="en-US" sz="4800" dirty="0"/>
+            <a:endParaRPr lang="en-US" sz="4600" dirty="0"/>
           </a:p>
         </p:txBody>
       </p:sp>
@@ -2153,7 +2153,7 @@
         <p:spPr>
           <a:xfrm>
             <a:off x="731520" y="1920240"/>
-            <a:ext cx="6583680" cy="1645920"/>
+            <a:ext cx="6675120" cy="1645920"/>
           </a:xfrm>
           <a:prstGeom prst="rect">
             <a:avLst/>
@@ -2166,7 +2166,7 @@
           <a:lstStyle>
             <a:lvl1pPr indent="0" marL="0">
               <a:buNone/>
-              <a:defRPr lang="en-US" sz="3000" dirty="0">
+              <a:defRPr lang="en-US" sz="2800" dirty="0">
                 <a:solidFill>
                   <a:srgbClr val="C9DCD8"/>
                 </a:solidFill>
@@ -2180,7 +2180,7 @@
             <a:pPr indent="0" marL="0">
               <a:buNone/>
             </a:pPr>
-            <a:endParaRPr lang="en-US" sz="3000" dirty="0"/>
+            <a:endParaRPr lang="en-US" sz="2800" dirty="0"/>
           </a:p>
         </p:txBody>
       </p:sp>
@@ -3071,7 +3071,7 @@
         <p:spPr>
           <a:xfrm>
             <a:off x="731520" y="640080"/>
-            <a:ext cx="6583680" cy="1188720"/>
+            <a:ext cx="6675120" cy="1188720"/>
           </a:xfrm>
           <a:prstGeom prst="rect">
             <a:avLst/>
@@ -3087,7 +3087,7 @@
               <a:buNone/>
             </a:pPr>
             <a:r>
-              <a:rPr lang="ko-KR" altLang="en-US" sz="4800" b="1" dirty="0">
+              <a:rPr lang="ko-KR" altLang="en-US" sz="4600" b="1" dirty="0">
                 <a:solidFill>
                   <a:srgbClr val="FFFFFF"/>
                 </a:solidFill>
@@ -3097,7 +3097,7 @@
               </a:rPr>
               <a:t>크기가 같은 분수</a:t>
             </a:r>
-            <a:endParaRPr lang="ko-KR" sz="4800" dirty="0"/>
+            <a:endParaRPr lang="ko-KR" sz="4600" dirty="0"/>
           </a:p>
         </p:txBody>
       </p:sp>
@@ -3112,7 +3112,7 @@
         <p:spPr>
           <a:xfrm>
             <a:off x="731520" y="1920240"/>
-            <a:ext cx="6583680" cy="1645920"/>
+            <a:ext cx="6675120" cy="1645920"/>
           </a:xfrm>
           <a:prstGeom prst="rect">
             <a:avLst/>
@@ -3128,7 +3128,7 @@
               <a:buNone/>
             </a:pPr>
             <a:r>
-              <a:rPr lang="ko-KR" altLang="en-US" sz="3000" dirty="0">
+              <a:rPr lang="ko-KR" altLang="en-US" sz="2800" dirty="0">
                 <a:solidFill>
                   <a:srgbClr val="C9DCD8"/>
                 </a:solidFill>
@@ -3138,7 +3138,7 @@
               </a:rPr>
               <a:t>모양이 다른 두 분수가 같은 양일 수 있을까?</a:t>
             </a:r>
-            <a:endParaRPr lang="ko-KR" sz="3000" dirty="0"/>
+            <a:endParaRPr lang="ko-KR" sz="2800" dirty="0"/>
           </a:p>
         </p:txBody>
       </p:sp>
@@ -3252,7 +3252,7 @@
         <p:spPr>
           <a:xfrm>
             <a:off x="8609076" y="1371600"/>
-            <a:ext cx="1200912" cy="1871472"/>
+            <a:ext cx="896112" cy="1871472"/>
           </a:xfrm>
           <a:prstGeom prst="rect">
             <a:avLst/>
@@ -3290,7 +3290,7 @@
         </p:nvSpPr>
         <p:spPr>
           <a:xfrm>
-            <a:off x="9919716" y="1371600"/>
+            <a:off x="9614916" y="1371600"/>
             <a:ext cx="909828" cy="899160"/>
           </a:xfrm>
           <a:prstGeom prst="rect">
@@ -3329,7 +3329,7 @@
         </p:nvSpPr>
         <p:spPr>
           <a:xfrm>
-            <a:off x="9956292" y="2307336"/>
+            <a:off x="9651492" y="2307336"/>
             <a:ext cx="836676" cy="0"/>
           </a:xfrm>
           <a:prstGeom prst="line">
@@ -3352,7 +3352,7 @@
         </p:nvSpPr>
         <p:spPr>
           <a:xfrm>
-            <a:off x="9919716" y="2343912"/>
+            <a:off x="9614916" y="2343912"/>
             <a:ext cx="909828" cy="899160"/>
           </a:xfrm>
           <a:prstGeom prst="rect">
@@ -3418,8 +3418,8 @@
         </p:nvSpPr>
         <p:spPr>
           <a:xfrm>
-            <a:off x="1005840" y="4041648"/>
-            <a:ext cx="10149840" cy="1883664"/>
+            <a:off x="1005840" y="4069080"/>
+            <a:ext cx="10149840" cy="1828800"/>
           </a:xfrm>
           <a:prstGeom prst="rect">
             <a:avLst/>
@@ -3593,8 +3593,8 @@
         </p:nvSpPr>
         <p:spPr>
           <a:xfrm>
-            <a:off x="822960" y="1435608"/>
-            <a:ext cx="10515600" cy="740664"/>
+            <a:off x="822960" y="1463040"/>
+            <a:ext cx="10515600" cy="685800"/>
           </a:xfrm>
           <a:prstGeom prst="rect">
             <a:avLst/>
@@ -3613,7 +3613,7 @@
               <a:buNone/>
             </a:pPr>
             <a:r>
-              <a:rPr lang="ko-KR" altLang="en-US" sz="2800" dirty="0">
+              <a:rPr lang="ko-KR" altLang="en-US" sz="2200" dirty="0">
                 <a:solidFill>
                   <a:srgbClr val="1F2937"/>
                 </a:solidFill>
@@ -3623,7 +3623,7 @@
               </a:rPr>
               <a:t>어떤 친구의 주장: “분자와 분모에 똑같이 1을 더해도 크기가 같은 분수가 돼요.”</a:t>
             </a:r>
-            <a:endParaRPr lang="ko-KR" sz="2800" dirty="0"/>
+            <a:endParaRPr lang="ko-KR" sz="2200" dirty="0"/>
           </a:p>
         </p:txBody>
       </p:sp>
@@ -3737,7 +3737,7 @@
         <p:spPr>
           <a:xfrm>
             <a:off x="1469136" y="3017520"/>
-            <a:ext cx="508000" cy="1032256"/>
+            <a:ext cx="654304" cy="1032256"/>
           </a:xfrm>
           <a:prstGeom prst="rect">
             <a:avLst/>
@@ -3775,7 +3775,7 @@
         </p:nvSpPr>
         <p:spPr>
           <a:xfrm>
-            <a:off x="2086864" y="3017520"/>
+            <a:off x="2233168" y="3017520"/>
             <a:ext cx="536448" cy="479552"/>
           </a:xfrm>
           <a:prstGeom prst="rect">
@@ -3814,7 +3814,7 @@
         </p:nvSpPr>
         <p:spPr>
           <a:xfrm>
-            <a:off x="2123440" y="3533648"/>
+            <a:off x="2269744" y="3533648"/>
             <a:ext cx="463296" cy="0"/>
           </a:xfrm>
           <a:prstGeom prst="line">
@@ -3837,7 +3837,7 @@
         </p:nvSpPr>
         <p:spPr>
           <a:xfrm>
-            <a:off x="2086864" y="3570224"/>
+            <a:off x="2233168" y="3570224"/>
             <a:ext cx="536448" cy="479552"/>
           </a:xfrm>
           <a:prstGeom prst="rect">
@@ -3877,7 +3877,7 @@
         <p:spPr>
           <a:xfrm>
             <a:off x="1091184" y="2871216"/>
-            <a:ext cx="1263904" cy="0"/>
+            <a:ext cx="1410208" cy="0"/>
           </a:xfrm>
           <a:prstGeom prst="line">
             <a:avLst/>
@@ -3901,7 +3901,7 @@
         <p:spPr>
           <a:xfrm>
             <a:off x="1091184" y="2503678"/>
-            <a:ext cx="1263904" cy="349250"/>
+            <a:ext cx="1410208" cy="349250"/>
           </a:xfrm>
           <a:prstGeom prst="rect">
             <a:avLst/>
@@ -3940,7 +3940,7 @@
         <p:spPr>
           <a:xfrm>
             <a:off x="1091184" y="4196080"/>
-            <a:ext cx="1263904" cy="0"/>
+            <a:ext cx="1410208" cy="0"/>
           </a:xfrm>
           <a:prstGeom prst="line">
             <a:avLst/>
@@ -3964,7 +3964,7 @@
         <p:spPr>
           <a:xfrm>
             <a:off x="1091184" y="4214368"/>
-            <a:ext cx="1263904" cy="349250"/>
+            <a:ext cx="1410208" cy="349250"/>
           </a:xfrm>
           <a:prstGeom prst="rect">
             <a:avLst/>
@@ -4433,8 +4433,8 @@
         </p:nvSpPr>
         <p:spPr>
           <a:xfrm>
-            <a:off x="822960" y="5093208"/>
-            <a:ext cx="10515600" cy="832104"/>
+            <a:off x="822960" y="5120640"/>
+            <a:ext cx="10515600" cy="777240"/>
           </a:xfrm>
           <a:prstGeom prst="rect">
             <a:avLst/>
@@ -4730,7 +4730,7 @@
         <p:spPr>
           <a:xfrm>
             <a:off x="1575816" y="2240280"/>
-            <a:ext cx="570992" cy="1272032"/>
+            <a:ext cx="469392" cy="1272032"/>
           </a:xfrm>
           <a:prstGeom prst="rect">
             <a:avLst/>
@@ -4768,7 +4768,7 @@
         </p:nvSpPr>
         <p:spPr>
           <a:xfrm>
-            <a:off x="2356307" y="2318207"/>
+            <a:off x="2254707" y="2318207"/>
             <a:ext cx="443586" cy="443586"/>
           </a:xfrm>
           <a:prstGeom prst="rect">
@@ -4793,7 +4793,7 @@
         </p:nvSpPr>
         <p:spPr>
           <a:xfrm>
-            <a:off x="2293112" y="2876296"/>
+            <a:off x="2191512" y="2876296"/>
             <a:ext cx="569976" cy="0"/>
           </a:xfrm>
           <a:prstGeom prst="line">
@@ -4816,7 +4816,7 @@
         </p:nvSpPr>
         <p:spPr>
           <a:xfrm>
-            <a:off x="2356307" y="2990799"/>
+            <a:off x="2254707" y="2990799"/>
             <a:ext cx="443586" cy="443586"/>
           </a:xfrm>
           <a:prstGeom prst="rect">
@@ -4841,8 +4841,8 @@
         </p:nvSpPr>
         <p:spPr>
           <a:xfrm>
-            <a:off x="3009392" y="2240280"/>
-            <a:ext cx="570992" cy="1272032"/>
+            <a:off x="2907792" y="2240280"/>
+            <a:ext cx="469392" cy="1272032"/>
           </a:xfrm>
           <a:prstGeom prst="rect">
             <a:avLst/>
@@ -4880,7 +4880,7 @@
         </p:nvSpPr>
         <p:spPr>
           <a:xfrm>
-            <a:off x="3789883" y="2318207"/>
+            <a:off x="3586683" y="2318207"/>
             <a:ext cx="443586" cy="443586"/>
           </a:xfrm>
           <a:prstGeom prst="rect">
@@ -4905,7 +4905,7 @@
         </p:nvSpPr>
         <p:spPr>
           <a:xfrm>
-            <a:off x="3726688" y="2876296"/>
+            <a:off x="3523488" y="2876296"/>
             <a:ext cx="569976" cy="0"/>
           </a:xfrm>
           <a:prstGeom prst="line">
@@ -4928,7 +4928,7 @@
         </p:nvSpPr>
         <p:spPr>
           <a:xfrm>
-            <a:off x="3789883" y="2990799"/>
+            <a:off x="3586683" y="2990799"/>
             <a:ext cx="443586" cy="443586"/>
           </a:xfrm>
           <a:prstGeom prst="rect">
@@ -5107,8 +5107,8 @@
         </p:nvSpPr>
         <p:spPr>
           <a:xfrm>
-            <a:off x="822960" y="4361688"/>
-            <a:ext cx="10515600" cy="832104"/>
+            <a:off x="822960" y="4389120"/>
+            <a:ext cx="10515600" cy="777240"/>
           </a:xfrm>
           <a:prstGeom prst="rect">
             <a:avLst/>
@@ -5459,7 +5459,7 @@
         <p:spPr>
           <a:xfrm>
             <a:off x="1278636" y="2103120"/>
-            <a:ext cx="476504" cy="912368"/>
+            <a:ext cx="405384" cy="912368"/>
           </a:xfrm>
           <a:prstGeom prst="rect">
             <a:avLst/>
@@ -5497,7 +5497,7 @@
         </p:nvSpPr>
         <p:spPr>
           <a:xfrm>
-            <a:off x="1864868" y="2103120"/>
+            <a:off x="1793748" y="2103120"/>
             <a:ext cx="483108" cy="419608"/>
           </a:xfrm>
           <a:prstGeom prst="rect">
@@ -5536,7 +5536,7 @@
         </p:nvSpPr>
         <p:spPr>
           <a:xfrm>
-            <a:off x="1901444" y="2559304"/>
+            <a:off x="1830324" y="2559304"/>
             <a:ext cx="409956" cy="0"/>
           </a:xfrm>
           <a:prstGeom prst="line">
@@ -5559,7 +5559,7 @@
         </p:nvSpPr>
         <p:spPr>
           <a:xfrm>
-            <a:off x="1864868" y="2595880"/>
+            <a:off x="1793748" y="2595880"/>
             <a:ext cx="483108" cy="419608"/>
           </a:xfrm>
           <a:prstGeom prst="rect">
@@ -5598,8 +5598,8 @@
         </p:nvSpPr>
         <p:spPr>
           <a:xfrm>
-            <a:off x="2457704" y="2103120"/>
-            <a:ext cx="476504" cy="912368"/>
+            <a:off x="2386584" y="2103120"/>
+            <a:ext cx="405384" cy="912368"/>
           </a:xfrm>
           <a:prstGeom prst="rect">
             <a:avLst/>
@@ -5637,7 +5637,7 @@
         </p:nvSpPr>
         <p:spPr>
           <a:xfrm>
-            <a:off x="3043936" y="2103120"/>
+            <a:off x="2901696" y="2103120"/>
             <a:ext cx="577088" cy="419608"/>
           </a:xfrm>
           <a:prstGeom prst="rect">
@@ -5676,7 +5676,7 @@
         </p:nvSpPr>
         <p:spPr>
           <a:xfrm>
-            <a:off x="3080512" y="2559304"/>
+            <a:off x="2938272" y="2559304"/>
             <a:ext cx="503936" cy="0"/>
           </a:xfrm>
           <a:prstGeom prst="line">
@@ -5699,7 +5699,7 @@
         </p:nvSpPr>
         <p:spPr>
           <a:xfrm>
-            <a:off x="3043936" y="2595880"/>
+            <a:off x="2901696" y="2595880"/>
             <a:ext cx="577088" cy="419608"/>
           </a:xfrm>
           <a:prstGeom prst="rect">
@@ -5738,8 +5738,8 @@
         </p:nvSpPr>
         <p:spPr>
           <a:xfrm>
-            <a:off x="3730752" y="2103120"/>
-            <a:ext cx="476504" cy="912368"/>
+            <a:off x="3588512" y="2103120"/>
+            <a:ext cx="405384" cy="912368"/>
           </a:xfrm>
           <a:prstGeom prst="rect">
             <a:avLst/>
@@ -5777,7 +5777,7 @@
         </p:nvSpPr>
         <p:spPr>
           <a:xfrm>
-            <a:off x="4316984" y="2103120"/>
+            <a:off x="4103624" y="2103120"/>
             <a:ext cx="577088" cy="419608"/>
           </a:xfrm>
           <a:prstGeom prst="rect">
@@ -5816,7 +5816,7 @@
         </p:nvSpPr>
         <p:spPr>
           <a:xfrm>
-            <a:off x="4353560" y="2559304"/>
+            <a:off x="4140200" y="2559304"/>
             <a:ext cx="503936" cy="0"/>
           </a:xfrm>
           <a:prstGeom prst="line">
@@ -5839,7 +5839,7 @@
         </p:nvSpPr>
         <p:spPr>
           <a:xfrm>
-            <a:off x="4316984" y="2595880"/>
+            <a:off x="4103624" y="2595880"/>
             <a:ext cx="577088" cy="419608"/>
           </a:xfrm>
           <a:prstGeom prst="rect">
@@ -6420,7 +6420,7 @@
         <p:spPr>
           <a:xfrm>
             <a:off x="7077456" y="2103120"/>
-            <a:ext cx="445008" cy="792480"/>
+            <a:ext cx="554736" cy="792480"/>
           </a:xfrm>
           <a:prstGeom prst="rect">
             <a:avLst/>
@@ -6458,7 +6458,7 @@
         </p:nvSpPr>
         <p:spPr>
           <a:xfrm>
-            <a:off x="7632192" y="2103120"/>
+            <a:off x="7741920" y="2103120"/>
             <a:ext cx="429768" cy="359664"/>
           </a:xfrm>
           <a:prstGeom prst="rect">
@@ -6497,7 +6497,7 @@
         </p:nvSpPr>
         <p:spPr>
           <a:xfrm>
-            <a:off x="7668768" y="2499360"/>
+            <a:off x="7778496" y="2499360"/>
             <a:ext cx="356616" cy="0"/>
           </a:xfrm>
           <a:prstGeom prst="line">
@@ -6520,7 +6520,7 @@
         </p:nvSpPr>
         <p:spPr>
           <a:xfrm>
-            <a:off x="7632192" y="2535936"/>
+            <a:off x="7741920" y="2535936"/>
             <a:ext cx="429768" cy="359664"/>
           </a:xfrm>
           <a:prstGeom prst="rect">
@@ -6700,7 +6700,7 @@
         <p:spPr>
           <a:xfrm>
             <a:off x="7077456" y="3291840"/>
-            <a:ext cx="445008" cy="792480"/>
+            <a:ext cx="554736" cy="792480"/>
           </a:xfrm>
           <a:prstGeom prst="rect">
             <a:avLst/>
@@ -6738,7 +6738,7 @@
         </p:nvSpPr>
         <p:spPr>
           <a:xfrm>
-            <a:off x="7632192" y="3291840"/>
+            <a:off x="7741920" y="3291840"/>
             <a:ext cx="429768" cy="359664"/>
           </a:xfrm>
           <a:prstGeom prst="rect">
@@ -6777,7 +6777,7 @@
         </p:nvSpPr>
         <p:spPr>
           <a:xfrm>
-            <a:off x="7668768" y="3688080"/>
+            <a:off x="7778496" y="3688080"/>
             <a:ext cx="356616" cy="0"/>
           </a:xfrm>
           <a:prstGeom prst="line">
@@ -6800,7 +6800,7 @@
         </p:nvSpPr>
         <p:spPr>
           <a:xfrm>
-            <a:off x="7632192" y="3724656"/>
+            <a:off x="7741920" y="3724656"/>
             <a:ext cx="429768" cy="359664"/>
           </a:xfrm>
           <a:prstGeom prst="rect">
@@ -6980,7 +6980,7 @@
         <p:spPr>
           <a:xfrm>
             <a:off x="7077456" y="4480560"/>
-            <a:ext cx="445008" cy="792480"/>
+            <a:ext cx="554736" cy="792480"/>
           </a:xfrm>
           <a:prstGeom prst="rect">
             <a:avLst/>
@@ -7018,7 +7018,7 @@
         </p:nvSpPr>
         <p:spPr>
           <a:xfrm>
-            <a:off x="7632192" y="4480560"/>
+            <a:off x="7741920" y="4480560"/>
             <a:ext cx="429768" cy="359664"/>
           </a:xfrm>
           <a:prstGeom prst="rect">
@@ -7057,7 +7057,7 @@
         </p:nvSpPr>
         <p:spPr>
           <a:xfrm>
-            <a:off x="7668768" y="4876800"/>
+            <a:off x="7778496" y="4876800"/>
             <a:ext cx="356616" cy="0"/>
           </a:xfrm>
           <a:prstGeom prst="line">
@@ -7080,7 +7080,7 @@
         </p:nvSpPr>
         <p:spPr>
           <a:xfrm>
-            <a:off x="7632192" y="4913376"/>
+            <a:off x="7741920" y="4913376"/>
             <a:ext cx="429768" cy="359664"/>
           </a:xfrm>
           <a:prstGeom prst="rect">
@@ -8277,8 +8277,8 @@
         </p:nvSpPr>
         <p:spPr>
           <a:xfrm>
-            <a:off x="1005840" y="1527048"/>
-            <a:ext cx="10149840" cy="969264"/>
+            <a:off x="1005840" y="1554480"/>
+            <a:ext cx="10149840" cy="914400"/>
           </a:xfrm>
           <a:prstGeom prst="rect">
             <a:avLst/>
@@ -8453,7 +8453,7 @@
         <p:spPr>
           <a:xfrm>
             <a:off x="822960" y="4206240"/>
-            <a:ext cx="460756" cy="852424"/>
+            <a:ext cx="579628" cy="852424"/>
           </a:xfrm>
           <a:prstGeom prst="rect">
             <a:avLst/>
@@ -8491,7 +8491,7 @@
         </p:nvSpPr>
         <p:spPr>
           <a:xfrm>
-            <a:off x="1393444" y="4206240"/>
+            <a:off x="1512316" y="4206240"/>
             <a:ext cx="456438" cy="389636"/>
           </a:xfrm>
           <a:prstGeom prst="rect">
@@ -8530,7 +8530,7 @@
         </p:nvSpPr>
         <p:spPr>
           <a:xfrm>
-            <a:off x="1430020" y="4632452"/>
+            <a:off x="1548892" y="4632452"/>
             <a:ext cx="383286" cy="0"/>
           </a:xfrm>
           <a:prstGeom prst="line">
@@ -8553,7 +8553,7 @@
         </p:nvSpPr>
         <p:spPr>
           <a:xfrm>
-            <a:off x="1393444" y="4669028"/>
+            <a:off x="1512316" y="4669028"/>
             <a:ext cx="456438" cy="389636"/>
           </a:xfrm>
           <a:prstGeom prst="rect">
@@ -8592,8 +8592,8 @@
         </p:nvSpPr>
         <p:spPr>
           <a:xfrm>
-            <a:off x="1959610" y="4206240"/>
-            <a:ext cx="460756" cy="852424"/>
+            <a:off x="2078482" y="4206240"/>
+            <a:ext cx="394716" cy="852424"/>
           </a:xfrm>
           <a:prstGeom prst="rect">
             <a:avLst/>
@@ -8631,7 +8631,7 @@
         </p:nvSpPr>
         <p:spPr>
           <a:xfrm>
-            <a:off x="2614148" y="4256893"/>
+            <a:off x="2666980" y="4256893"/>
             <a:ext cx="288331" cy="288331"/>
           </a:xfrm>
           <a:prstGeom prst="rect">
@@ -8656,7 +8656,7 @@
         </p:nvSpPr>
         <p:spPr>
           <a:xfrm>
-            <a:off x="2566670" y="4632452"/>
+            <a:off x="2619502" y="4632452"/>
             <a:ext cx="383286" cy="0"/>
           </a:xfrm>
           <a:prstGeom prst="line">
@@ -8679,7 +8679,7 @@
         </p:nvSpPr>
         <p:spPr>
           <a:xfrm>
-            <a:off x="2530094" y="4669028"/>
+            <a:off x="2582926" y="4669028"/>
             <a:ext cx="456438" cy="389636"/>
           </a:xfrm>
           <a:prstGeom prst="rect">
@@ -8719,7 +8719,7 @@
         <p:spPr>
           <a:xfrm>
             <a:off x="4206240" y="4206240"/>
-            <a:ext cx="460756" cy="852424"/>
+            <a:ext cx="579628" cy="852424"/>
           </a:xfrm>
           <a:prstGeom prst="rect">
             <a:avLst/>
@@ -8757,7 +8757,7 @@
         </p:nvSpPr>
         <p:spPr>
           <a:xfrm>
-            <a:off x="4776724" y="4206240"/>
+            <a:off x="4895596" y="4206240"/>
             <a:ext cx="547624" cy="389636"/>
           </a:xfrm>
           <a:prstGeom prst="rect">
@@ -8796,7 +8796,7 @@
         </p:nvSpPr>
         <p:spPr>
           <a:xfrm>
-            <a:off x="4813300" y="4632452"/>
+            <a:off x="4932172" y="4632452"/>
             <a:ext cx="474472" cy="0"/>
           </a:xfrm>
           <a:prstGeom prst="line">
@@ -8819,7 +8819,7 @@
         </p:nvSpPr>
         <p:spPr>
           <a:xfrm>
-            <a:off x="4776724" y="4669028"/>
+            <a:off x="4895596" y="4669028"/>
             <a:ext cx="547624" cy="389636"/>
           </a:xfrm>
           <a:prstGeom prst="rect">
@@ -8858,8 +8858,8 @@
         </p:nvSpPr>
         <p:spPr>
           <a:xfrm>
-            <a:off x="5434076" y="4206240"/>
-            <a:ext cx="460756" cy="852424"/>
+            <a:off x="5552948" y="4206240"/>
+            <a:ext cx="394716" cy="852424"/>
           </a:xfrm>
           <a:prstGeom prst="rect">
             <a:avLst/>
@@ -8897,7 +8897,7 @@
         </p:nvSpPr>
         <p:spPr>
           <a:xfrm>
-            <a:off x="6004560" y="4206240"/>
+            <a:off x="6057392" y="4206240"/>
             <a:ext cx="456438" cy="389636"/>
           </a:xfrm>
           <a:prstGeom prst="rect">
@@ -8936,7 +8936,7 @@
         </p:nvSpPr>
         <p:spPr>
           <a:xfrm>
-            <a:off x="6041136" y="4632452"/>
+            <a:off x="6093968" y="4632452"/>
             <a:ext cx="383286" cy="0"/>
           </a:xfrm>
           <a:prstGeom prst="line">
@@ -8959,7 +8959,7 @@
         </p:nvSpPr>
         <p:spPr>
           <a:xfrm>
-            <a:off x="6088614" y="4719681"/>
+            <a:off x="6141446" y="4719681"/>
             <a:ext cx="288331" cy="288331"/>
           </a:xfrm>
           <a:prstGeom prst="rect">
@@ -9671,7 +9671,7 @@
         <p:spPr>
           <a:xfrm>
             <a:off x="4572000" y="4343400"/>
-            <a:ext cx="460756" cy="852424"/>
+            <a:ext cx="579628" cy="852424"/>
           </a:xfrm>
           <a:prstGeom prst="rect">
             <a:avLst/>
@@ -9709,7 +9709,7 @@
         </p:nvSpPr>
         <p:spPr>
           <a:xfrm>
-            <a:off x="5226538" y="4394053"/>
+            <a:off x="5345410" y="4394053"/>
             <a:ext cx="288331" cy="288331"/>
           </a:xfrm>
           <a:prstGeom prst="rect">
@@ -9734,7 +9734,7 @@
         </p:nvSpPr>
         <p:spPr>
           <a:xfrm>
-            <a:off x="5179060" y="4769612"/>
+            <a:off x="5297932" y="4769612"/>
             <a:ext cx="383286" cy="0"/>
           </a:xfrm>
           <a:prstGeom prst="line">
@@ -9757,7 +9757,7 @@
         </p:nvSpPr>
         <p:spPr>
           <a:xfrm>
-            <a:off x="5226538" y="4856841"/>
+            <a:off x="5345410" y="4856841"/>
             <a:ext cx="288331" cy="288331"/>
           </a:xfrm>
           <a:prstGeom prst="rect">
@@ -9935,7 +9935,7 @@
         <p:spPr>
           <a:xfrm>
             <a:off x="10424160" y="4343400"/>
-            <a:ext cx="460756" cy="852424"/>
+            <a:ext cx="579628" cy="852424"/>
           </a:xfrm>
           <a:prstGeom prst="rect">
             <a:avLst/>
@@ -9973,7 +9973,7 @@
         </p:nvSpPr>
         <p:spPr>
           <a:xfrm>
-            <a:off x="11078698" y="4394053"/>
+            <a:off x="11197570" y="4394053"/>
             <a:ext cx="288331" cy="288331"/>
           </a:xfrm>
           <a:prstGeom prst="rect">
@@ -9998,7 +9998,7 @@
         </p:nvSpPr>
         <p:spPr>
           <a:xfrm>
-            <a:off x="11031220" y="4769612"/>
+            <a:off x="11150092" y="4769612"/>
             <a:ext cx="383286" cy="0"/>
           </a:xfrm>
           <a:prstGeom prst="line">
@@ -10021,7 +10021,7 @@
         </p:nvSpPr>
         <p:spPr>
           <a:xfrm>
-            <a:off x="11078698" y="4856841"/>
+            <a:off x="11197570" y="4856841"/>
             <a:ext cx="288331" cy="288331"/>
           </a:xfrm>
           <a:prstGeom prst="rect">
@@ -10872,8 +10872,8 @@
         </p:nvSpPr>
         <p:spPr>
           <a:xfrm>
-            <a:off x="822960" y="4864608"/>
-            <a:ext cx="10515600" cy="1014984"/>
+            <a:off x="822960" y="4892040"/>
+            <a:ext cx="10515600" cy="960120"/>
           </a:xfrm>
           <a:prstGeom prst="rect">
             <a:avLst/>
@@ -11470,8 +11470,8 @@
         </p:nvSpPr>
         <p:spPr>
           <a:xfrm>
-            <a:off x="822960" y="5047488"/>
-            <a:ext cx="10515600" cy="923544"/>
+            <a:off x="822960" y="5074920"/>
+            <a:ext cx="10515600" cy="868680"/>
           </a:xfrm>
           <a:prstGeom prst="rect">
             <a:avLst/>
@@ -12983,8 +12983,8 @@
         </p:nvSpPr>
         <p:spPr>
           <a:xfrm>
-            <a:off x="822960" y="4270248"/>
-            <a:ext cx="2953512" cy="1563624"/>
+            <a:off x="822960" y="4297680"/>
+            <a:ext cx="2953512" cy="1508760"/>
           </a:xfrm>
           <a:prstGeom prst="rect">
             <a:avLst/>
@@ -13072,8 +13072,8 @@
         </p:nvSpPr>
         <p:spPr>
           <a:xfrm>
-            <a:off x="4599432" y="4270248"/>
-            <a:ext cx="2953512" cy="1563624"/>
+            <a:off x="4599432" y="4297680"/>
+            <a:ext cx="2953512" cy="1508760"/>
           </a:xfrm>
           <a:prstGeom prst="rect">
             <a:avLst/>
@@ -13161,8 +13161,8 @@
         </p:nvSpPr>
         <p:spPr>
           <a:xfrm>
-            <a:off x="8375904" y="4270248"/>
-            <a:ext cx="2962656" cy="1563624"/>
+            <a:off x="8375904" y="4297680"/>
+            <a:ext cx="2962656" cy="1508760"/>
           </a:xfrm>
           <a:prstGeom prst="rect">
             <a:avLst/>
@@ -14146,7 +14146,7 @@
         <p:spPr>
           <a:xfrm>
             <a:off x="1495806" y="4663440"/>
-            <a:ext cx="523748" cy="1092200"/>
+            <a:ext cx="437388" cy="1092200"/>
           </a:xfrm>
           <a:prstGeom prst="rect">
             <a:avLst/>
@@ -14184,7 +14184,7 @@
         </p:nvSpPr>
         <p:spPr>
           <a:xfrm>
-            <a:off x="2129282" y="4663440"/>
+            <a:off x="2042922" y="4663440"/>
             <a:ext cx="563118" cy="509524"/>
           </a:xfrm>
           <a:prstGeom prst="rect">
@@ -14223,7 +14223,7 @@
         </p:nvSpPr>
         <p:spPr>
           <a:xfrm>
-            <a:off x="2165858" y="5209540"/>
+            <a:off x="2079498" y="5209540"/>
             <a:ext cx="489966" cy="0"/>
           </a:xfrm>
           <a:prstGeom prst="line">
@@ -14246,7 +14246,7 @@
         </p:nvSpPr>
         <p:spPr>
           <a:xfrm>
-            <a:off x="2129282" y="5246116"/>
+            <a:off x="2042922" y="5246116"/>
             <a:ext cx="563118" cy="509524"/>
           </a:xfrm>
           <a:prstGeom prst="rect">
@@ -14285,8 +14285,8 @@
         </p:nvSpPr>
         <p:spPr>
           <a:xfrm>
-            <a:off x="2802128" y="4663440"/>
-            <a:ext cx="523748" cy="1092200"/>
+            <a:off x="2715768" y="4663440"/>
+            <a:ext cx="437388" cy="1092200"/>
           </a:xfrm>
           <a:prstGeom prst="rect">
             <a:avLst/>
@@ -14324,7 +14324,7 @@
         </p:nvSpPr>
         <p:spPr>
           <a:xfrm>
-            <a:off x="3435604" y="4663440"/>
+            <a:off x="3262884" y="4663440"/>
             <a:ext cx="563118" cy="509524"/>
           </a:xfrm>
           <a:prstGeom prst="rect">
@@ -14363,7 +14363,7 @@
         </p:nvSpPr>
         <p:spPr>
           <a:xfrm>
-            <a:off x="3472180" y="5209540"/>
+            <a:off x="3299460" y="5209540"/>
             <a:ext cx="489966" cy="0"/>
           </a:xfrm>
           <a:prstGeom prst="line">
@@ -14386,7 +14386,7 @@
         </p:nvSpPr>
         <p:spPr>
           <a:xfrm>
-            <a:off x="3435604" y="5246116"/>
+            <a:off x="3262884" y="5246116"/>
             <a:ext cx="563118" cy="509524"/>
           </a:xfrm>
           <a:prstGeom prst="rect">
@@ -14452,8 +14452,8 @@
         </p:nvSpPr>
         <p:spPr>
           <a:xfrm>
-            <a:off x="5760720" y="4773168"/>
-            <a:ext cx="5577840" cy="1152144"/>
+            <a:off x="5760720" y="4800600"/>
+            <a:ext cx="5577840" cy="1097280"/>
           </a:xfrm>
           <a:prstGeom prst="rect">
             <a:avLst/>
@@ -14953,7 +14953,7 @@
         <p:spPr>
           <a:xfrm>
             <a:off x="7275576" y="1828800"/>
-            <a:ext cx="508000" cy="1032256"/>
+            <a:ext cx="426720" cy="1032256"/>
           </a:xfrm>
           <a:prstGeom prst="rect">
             <a:avLst/>
@@ -14991,7 +14991,7 @@
         </p:nvSpPr>
         <p:spPr>
           <a:xfrm>
-            <a:off x="7893304" y="1828800"/>
+            <a:off x="7812024" y="1828800"/>
             <a:ext cx="536448" cy="479552"/>
           </a:xfrm>
           <a:prstGeom prst="rect">
@@ -15030,7 +15030,7 @@
         </p:nvSpPr>
         <p:spPr>
           <a:xfrm>
-            <a:off x="7929880" y="2344928"/>
+            <a:off x="7848600" y="2344928"/>
             <a:ext cx="463296" cy="0"/>
           </a:xfrm>
           <a:prstGeom prst="line">
@@ -15053,7 +15053,7 @@
         </p:nvSpPr>
         <p:spPr>
           <a:xfrm>
-            <a:off x="7893304" y="2381504"/>
+            <a:off x="7812024" y="2381504"/>
             <a:ext cx="536448" cy="479552"/>
           </a:xfrm>
           <a:prstGeom prst="rect">
@@ -15093,7 +15093,7 @@
         <p:spPr>
           <a:xfrm>
             <a:off x="6897624" y="1682496"/>
-            <a:ext cx="1263904" cy="0"/>
+            <a:ext cx="1182624" cy="0"/>
           </a:xfrm>
           <a:prstGeom prst="line">
             <a:avLst/>
@@ -15117,7 +15117,7 @@
         <p:spPr>
           <a:xfrm>
             <a:off x="6897624" y="1314958"/>
-            <a:ext cx="1263904" cy="349250"/>
+            <a:ext cx="1182624" cy="349250"/>
           </a:xfrm>
           <a:prstGeom prst="rect">
             <a:avLst/>
@@ -15156,7 +15156,7 @@
         <p:spPr>
           <a:xfrm>
             <a:off x="6897624" y="3007360"/>
-            <a:ext cx="1263904" cy="0"/>
+            <a:ext cx="1182624" cy="0"/>
           </a:xfrm>
           <a:prstGeom prst="line">
             <a:avLst/>
@@ -15180,7 +15180,7 @@
         <p:spPr>
           <a:xfrm>
             <a:off x="6897624" y="3025648"/>
-            <a:ext cx="1263904" cy="349250"/>
+            <a:ext cx="1182624" cy="349250"/>
           </a:xfrm>
           <a:prstGeom prst="rect">
             <a:avLst/>
@@ -15320,7 +15320,7 @@
         <p:spPr>
           <a:xfrm>
             <a:off x="9973056" y="1828800"/>
-            <a:ext cx="508000" cy="1032256"/>
+            <a:ext cx="426720" cy="1032256"/>
           </a:xfrm>
           <a:prstGeom prst="rect">
             <a:avLst/>
@@ -15358,7 +15358,7 @@
         </p:nvSpPr>
         <p:spPr>
           <a:xfrm>
-            <a:off x="10590784" y="1828800"/>
+            <a:off x="10509504" y="1828800"/>
             <a:ext cx="536448" cy="479552"/>
           </a:xfrm>
           <a:prstGeom prst="rect">
@@ -15397,7 +15397,7 @@
         </p:nvSpPr>
         <p:spPr>
           <a:xfrm>
-            <a:off x="10627360" y="2344928"/>
+            <a:off x="10546080" y="2344928"/>
             <a:ext cx="463296" cy="0"/>
           </a:xfrm>
           <a:prstGeom prst="line">
@@ -15420,7 +15420,7 @@
         </p:nvSpPr>
         <p:spPr>
           <a:xfrm>
-            <a:off x="10590784" y="2381504"/>
+            <a:off x="10509504" y="2381504"/>
             <a:ext cx="536448" cy="479552"/>
           </a:xfrm>
           <a:prstGeom prst="rect">
@@ -15460,7 +15460,7 @@
         <p:spPr>
           <a:xfrm>
             <a:off x="9595104" y="1682496"/>
-            <a:ext cx="1263904" cy="0"/>
+            <a:ext cx="1182624" cy="0"/>
           </a:xfrm>
           <a:prstGeom prst="line">
             <a:avLst/>
@@ -15484,7 +15484,7 @@
         <p:spPr>
           <a:xfrm>
             <a:off x="9595104" y="1314958"/>
-            <a:ext cx="1263904" cy="349250"/>
+            <a:ext cx="1182624" cy="349250"/>
           </a:xfrm>
           <a:prstGeom prst="rect">
             <a:avLst/>
@@ -15523,7 +15523,7 @@
         <p:spPr>
           <a:xfrm>
             <a:off x="9595104" y="3007360"/>
-            <a:ext cx="1263904" cy="0"/>
+            <a:ext cx="1182624" cy="0"/>
           </a:xfrm>
           <a:prstGeom prst="line">
             <a:avLst/>
@@ -15547,7 +15547,7 @@
         <p:spPr>
           <a:xfrm>
             <a:off x="9595104" y="3025648"/>
-            <a:ext cx="1263904" cy="349250"/>
+            <a:ext cx="1182624" cy="349250"/>
           </a:xfrm>
           <a:prstGeom prst="rect">
             <a:avLst/>
@@ -15612,8 +15612,8 @@
         </p:nvSpPr>
         <p:spPr>
           <a:xfrm>
-            <a:off x="822960" y="4361688"/>
-            <a:ext cx="10515600" cy="832104"/>
+            <a:off x="822960" y="4389120"/>
+            <a:ext cx="10515600" cy="777240"/>
           </a:xfrm>
           <a:prstGeom prst="rect">
             <a:avLst/>
@@ -16302,7 +16302,7 @@
         <p:spPr>
           <a:xfrm>
             <a:off x="8327136" y="1828800"/>
-            <a:ext cx="508000" cy="1032256"/>
+            <a:ext cx="426720" cy="1032256"/>
           </a:xfrm>
           <a:prstGeom prst="rect">
             <a:avLst/>
@@ -16340,7 +16340,7 @@
         </p:nvSpPr>
         <p:spPr>
           <a:xfrm>
-            <a:off x="8944864" y="1828800"/>
+            <a:off x="8863584" y="1828800"/>
             <a:ext cx="536448" cy="479552"/>
           </a:xfrm>
           <a:prstGeom prst="rect">
@@ -16379,7 +16379,7 @@
         </p:nvSpPr>
         <p:spPr>
           <a:xfrm>
-            <a:off x="8981440" y="2344928"/>
+            <a:off x="8900160" y="2344928"/>
             <a:ext cx="463296" cy="0"/>
           </a:xfrm>
           <a:prstGeom prst="line">
@@ -16402,7 +16402,7 @@
         </p:nvSpPr>
         <p:spPr>
           <a:xfrm>
-            <a:off x="8944864" y="2381504"/>
+            <a:off x="8863584" y="2381504"/>
             <a:ext cx="536448" cy="479552"/>
           </a:xfrm>
           <a:prstGeom prst="rect">
@@ -16442,7 +16442,7 @@
         <p:spPr>
           <a:xfrm>
             <a:off x="7949184" y="1682496"/>
-            <a:ext cx="1263904" cy="0"/>
+            <a:ext cx="1182624" cy="0"/>
           </a:xfrm>
           <a:prstGeom prst="line">
             <a:avLst/>
@@ -16466,7 +16466,7 @@
         <p:spPr>
           <a:xfrm>
             <a:off x="7949184" y="1314958"/>
-            <a:ext cx="1263904" cy="349250"/>
+            <a:ext cx="1182624" cy="349250"/>
           </a:xfrm>
           <a:prstGeom prst="rect">
             <a:avLst/>
@@ -16505,7 +16505,7 @@
         <p:spPr>
           <a:xfrm>
             <a:off x="7949184" y="3007360"/>
-            <a:ext cx="1263904" cy="0"/>
+            <a:ext cx="1182624" cy="0"/>
           </a:xfrm>
           <a:prstGeom prst="line">
             <a:avLst/>
@@ -16529,7 +16529,7 @@
         <p:spPr>
           <a:xfrm>
             <a:off x="7949184" y="3025648"/>
-            <a:ext cx="1263904" cy="349250"/>
+            <a:ext cx="1182624" cy="349250"/>
           </a:xfrm>
           <a:prstGeom prst="rect">
             <a:avLst/>
@@ -16594,8 +16594,8 @@
         </p:nvSpPr>
         <p:spPr>
           <a:xfrm>
-            <a:off x="822960" y="4361688"/>
-            <a:ext cx="10515600" cy="832104"/>
+            <a:off x="822960" y="4389120"/>
+            <a:ext cx="10515600" cy="777240"/>
           </a:xfrm>
           <a:prstGeom prst="rect">
             <a:avLst/>
@@ -16946,7 +16946,7 @@
         <p:spPr>
           <a:xfrm>
             <a:off x="2082546" y="1371600"/>
-            <a:ext cx="492252" cy="972312"/>
+            <a:ext cx="416052" cy="972312"/>
           </a:xfrm>
           <a:prstGeom prst="rect">
             <a:avLst/>
@@ -16984,7 +16984,7 @@
         </p:nvSpPr>
         <p:spPr>
           <a:xfrm>
-            <a:off x="2773070" y="1430045"/>
+            <a:off x="2696870" y="1430045"/>
             <a:ext cx="332689" cy="332689"/>
           </a:xfrm>
           <a:prstGeom prst="rect">
@@ -17009,7 +17009,7 @@
         </p:nvSpPr>
         <p:spPr>
           <a:xfrm>
-            <a:off x="2721102" y="1857756"/>
+            <a:off x="2644902" y="1857756"/>
             <a:ext cx="436626" cy="0"/>
           </a:xfrm>
           <a:prstGeom prst="line">
@@ -17032,7 +17032,7 @@
         </p:nvSpPr>
         <p:spPr>
           <a:xfrm>
-            <a:off x="2684526" y="1894332"/>
+            <a:off x="2608326" y="1894332"/>
             <a:ext cx="509778" cy="449580"/>
           </a:xfrm>
           <a:prstGeom prst="rect">
@@ -17220,7 +17220,7 @@
         <p:spPr>
           <a:xfrm>
             <a:off x="2082546" y="2788920"/>
-            <a:ext cx="492252" cy="972312"/>
+            <a:ext cx="416052" cy="972312"/>
           </a:xfrm>
           <a:prstGeom prst="rect">
             <a:avLst/>
@@ -17258,7 +17258,7 @@
         </p:nvSpPr>
         <p:spPr>
           <a:xfrm>
-            <a:off x="2684526" y="2788920"/>
+            <a:off x="2608326" y="2788920"/>
             <a:ext cx="509778" cy="449580"/>
           </a:xfrm>
           <a:prstGeom prst="rect">
@@ -17297,7 +17297,7 @@
         </p:nvSpPr>
         <p:spPr>
           <a:xfrm>
-            <a:off x="2721102" y="3275076"/>
+            <a:off x="2644902" y="3275076"/>
             <a:ext cx="436626" cy="0"/>
           </a:xfrm>
           <a:prstGeom prst="line">
@@ -17320,7 +17320,7 @@
         </p:nvSpPr>
         <p:spPr>
           <a:xfrm>
-            <a:off x="2773070" y="3370097"/>
+            <a:off x="2696870" y="3370097"/>
             <a:ext cx="332689" cy="332689"/>
           </a:xfrm>
           <a:prstGeom prst="rect">
@@ -17494,7 +17494,7 @@
         <p:spPr>
           <a:xfrm>
             <a:off x="2082546" y="4206240"/>
-            <a:ext cx="492252" cy="972312"/>
+            <a:ext cx="416052" cy="972312"/>
           </a:xfrm>
           <a:prstGeom prst="rect">
             <a:avLst/>
@@ -17532,7 +17532,7 @@
         </p:nvSpPr>
         <p:spPr>
           <a:xfrm>
-            <a:off x="2684526" y="4206240"/>
+            <a:off x="2608326" y="4206240"/>
             <a:ext cx="509778" cy="449580"/>
           </a:xfrm>
           <a:prstGeom prst="rect">
@@ -17571,7 +17571,7 @@
         </p:nvSpPr>
         <p:spPr>
           <a:xfrm>
-            <a:off x="2721102" y="4692396"/>
+            <a:off x="2644902" y="4692396"/>
             <a:ext cx="436626" cy="0"/>
           </a:xfrm>
           <a:prstGeom prst="line">
@@ -17594,7 +17594,7 @@
         </p:nvSpPr>
         <p:spPr>
           <a:xfrm>
-            <a:off x="2773070" y="4787417"/>
+            <a:off x="2696870" y="4787417"/>
             <a:ext cx="332689" cy="332689"/>
           </a:xfrm>
           <a:prstGeom prst="rect">
@@ -17646,8 +17646,8 @@
         </p:nvSpPr>
         <p:spPr>
           <a:xfrm>
-            <a:off x="5760720" y="1554480"/>
-            <a:ext cx="5577840" cy="640080"/>
+            <a:off x="5760720" y="1508760"/>
+            <a:ext cx="5577840" cy="2971800"/>
           </a:xfrm>
           <a:prstGeom prst="rect">
             <a:avLst/>

--- a/dist/초5/수학/분수의성질/초5_수학_분수의성질_01_크기가같은분수.pptx
+++ b/dist/초5/수학/분수의성질/초5_수학_분수의성질_01_크기가같은분수.pptx
@@ -121,13 +121,13 @@
   <p:extLst>
     <p:ext uri="{521415D9-36F7-43E2-AB2F-B90AF26B5E84}">
       <p14:sectionLst xmlns:p14="http://schemas.microsoft.com/office/powerpoint/2010/main">
-        <p14:section name="도입" id="{c1c1eae5-3917-9795-3a01-c07b05295f25}">
+        <p14:section name="도입" id="{a59fa85c-99e6-a94e-fc0e-ec2b30eae6b4}">
           <p14:sldIdLst>
             <p14:sldId id="256"/>
             <p14:sldId id="257"/>
           </p14:sldIdLst>
         </p14:section>
-        <p14:section name="개념" id="{fd08365d-eddf-17b2-f788-586c70d40053}">
+        <p14:section name="개념" id="{dc915966-6f39-f7dc-4327-c0d702f4f046}">
           <p14:sldIdLst>
             <p14:sldId id="258"/>
             <p14:sldId id="259"/>
@@ -137,25 +137,25 @@
             <p14:sldId id="263"/>
           </p14:sldIdLst>
         </p14:section>
-        <p14:section name="연습" id="{abd959de-ede5-8501-13d7-5c4415e5c8ad}">
+        <p14:section name="연습" id="{a8972c97-b3a5-fda1-c7c5-d9bab8e91322}">
           <p14:sldIdLst>
             <p14:sldId id="264"/>
             <p14:sldId id="265"/>
           </p14:sldIdLst>
         </p14:section>
-        <p14:section name="확인" id="{4d2e0aea-23e2-f890-6889-7f0cbf9eaa11}">
+        <p14:section name="확인" id="{308e7c74-ae3f-425f-d797-2ab4ffe2fed1}">
           <p14:sldIdLst>
             <p14:sldId id="266"/>
             <p14:sldId id="267"/>
             <p14:sldId id="268"/>
           </p14:sldIdLst>
         </p14:section>
-        <p14:section name="정리" id="{328f3bb1-cf7c-b706-4dae-e1f2b3545a88}">
+        <p14:section name="정리" id="{74edaaec-b353-ff61-f699-f714b29df0d6}">
           <p14:sldIdLst>
             <p14:sldId id="269"/>
           </p14:sldIdLst>
         </p14:section>
-        <p14:section name="보충" id="{5bf1baeb-27b5-7b5e-c46b-9f6f43901485}">
+        <p14:section name="보충" id="{ddf2b40e-2ed8-1479-9872-6ee8d6a9f497}">
           <p14:sldIdLst>
             <p14:sldId id="270"/>
           </p14:sldIdLst>
@@ -3083,7 +3083,7 @@
           <a:bodyPr wrap="square" lIns="0" tIns="0" rIns="0" bIns="0" rtlCol="0" anchor="ctr"/>
           <a:lstStyle/>
           <a:p>
-            <a:pPr algn="l" indent="0" marL="0">
+            <a:pPr eaLnBrk="0" algn="l" indent="0" marL="0">
               <a:buNone/>
             </a:pPr>
             <a:r>
@@ -3124,7 +3124,7 @@
           <a:bodyPr wrap="square" lIns="0" tIns="0" rIns="0" bIns="0" rtlCol="0" anchor="t"/>
           <a:lstStyle/>
           <a:p>
-            <a:pPr indent="0" marL="0">
+            <a:pPr eaLnBrk="0" indent="0" marL="0">
               <a:buNone/>
             </a:pPr>
             <a:r>
@@ -3163,7 +3163,7 @@
           <a:bodyPr wrap="square" lIns="0" tIns="0" rIns="0" bIns="0" rtlCol="0" anchor="ctr"/>
           <a:lstStyle/>
           <a:p>
-            <a:pPr algn="ctr" indent="0" marL="0">
+            <a:pPr eaLnBrk="0" algn="ctr" indent="0" marL="0">
               <a:buNone/>
             </a:pPr>
             <a:r>
@@ -3225,7 +3225,7 @@
           <a:bodyPr wrap="square" lIns="0" tIns="0" rIns="0" bIns="0" rtlCol="0" anchor="ctr"/>
           <a:lstStyle/>
           <a:p>
-            <a:pPr algn="ctr" indent="0" marL="0">
+            <a:pPr eaLnBrk="0" algn="ctr" indent="0" marL="0">
               <a:buNone/>
             </a:pPr>
             <a:r>
@@ -3264,7 +3264,7 @@
           <a:bodyPr wrap="square" lIns="0" tIns="0" rIns="0" bIns="0" rtlCol="0" anchor="ctr"/>
           <a:lstStyle/>
           <a:p>
-            <a:pPr algn="ctr" indent="0" marL="0">
+            <a:pPr eaLnBrk="0" algn="ctr" indent="0" marL="0">
               <a:buNone/>
             </a:pPr>
             <a:r>
@@ -3303,7 +3303,7 @@
           <a:bodyPr wrap="square" lIns="0" tIns="0" rIns="0" bIns="0" rtlCol="0" anchor="ctr"/>
           <a:lstStyle/>
           <a:p>
-            <a:pPr algn="ctr" indent="0" marL="0">
+            <a:pPr eaLnBrk="0" algn="ctr" indent="0" marL="0">
               <a:buNone/>
             </a:pPr>
             <a:r>
@@ -3365,7 +3365,7 @@
           <a:bodyPr wrap="square" lIns="0" tIns="0" rIns="0" bIns="0" rtlCol="0" anchor="ctr"/>
           <a:lstStyle/>
           <a:p>
-            <a:pPr algn="ctr" indent="0" marL="0">
+            <a:pPr eaLnBrk="0" algn="ctr" indent="0" marL="0">
               <a:buNone/>
             </a:pPr>
             <a:r>
@@ -3431,7 +3431,7 @@
           <a:bodyPr wrap="square" lIns="0" tIns="0" rIns="0" bIns="0" rtlCol="0" anchor="ctr"/>
           <a:lstStyle/>
           <a:p>
-            <a:pPr indent="0" marL="0">
+            <a:pPr eaLnBrk="0" indent="0" marL="0">
               <a:spcAft>
                 <a:spcPts val="600"/>
               </a:spcAft>
@@ -3451,7 +3451,7 @@
             <a:endParaRPr lang="ko-KR" sz="2800" dirty="0"/>
           </a:p>
           <a:p>
-            <a:pPr indent="0" marL="0">
+            <a:pPr eaLnBrk="0" indent="0" marL="0">
               <a:spcAft>
                 <a:spcPts val="600"/>
               </a:spcAft>
@@ -3471,7 +3471,7 @@
             <a:endParaRPr lang="ko-KR" sz="2800" dirty="0"/>
           </a:p>
           <a:p>
-            <a:pPr indent="0" marL="0">
+            <a:pPr eaLnBrk="0" indent="0" marL="0">
               <a:spcAft>
                 <a:spcPts val="600"/>
               </a:spcAft>
@@ -3540,7 +3540,7 @@
           <a:bodyPr wrap="square" lIns="0" tIns="0" rIns="0" bIns="0" rtlCol="0" anchor="ctr"/>
           <a:lstStyle/>
           <a:p>
-            <a:pPr algn="l" indent="0" marL="0">
+            <a:pPr eaLnBrk="0" algn="l" indent="0" marL="0">
               <a:buNone/>
             </a:pPr>
             <a:r>
@@ -3606,7 +3606,7 @@
           <a:bodyPr wrap="square" lIns="0" tIns="0" rIns="0" bIns="0" rtlCol="0" anchor="ctr"/>
           <a:lstStyle/>
           <a:p>
-            <a:pPr indent="0" marL="0">
+            <a:pPr eaLnBrk="0" indent="0" marL="0">
               <a:spcAft>
                 <a:spcPts val="600"/>
               </a:spcAft>
@@ -3648,7 +3648,7 @@
           <a:bodyPr wrap="square" lIns="0" tIns="0" rIns="0" bIns="0" rtlCol="0" anchor="ctr"/>
           <a:lstStyle/>
           <a:p>
-            <a:pPr algn="ctr" indent="0" marL="0">
+            <a:pPr eaLnBrk="0" algn="ctr" indent="0" marL="0">
               <a:buNone/>
             </a:pPr>
             <a:r>
@@ -3710,7 +3710,7 @@
           <a:bodyPr wrap="square" lIns="0" tIns="0" rIns="0" bIns="0" rtlCol="0" anchor="ctr"/>
           <a:lstStyle/>
           <a:p>
-            <a:pPr algn="ctr" indent="0" marL="0">
+            <a:pPr eaLnBrk="0" algn="ctr" indent="0" marL="0">
               <a:buNone/>
             </a:pPr>
             <a:r>
@@ -3749,7 +3749,7 @@
           <a:bodyPr wrap="square" lIns="0" tIns="0" rIns="0" bIns="0" rtlCol="0" anchor="ctr"/>
           <a:lstStyle/>
           <a:p>
-            <a:pPr algn="ctr" indent="0" marL="0">
+            <a:pPr eaLnBrk="0" algn="ctr" indent="0" marL="0">
               <a:buNone/>
             </a:pPr>
             <a:r>
@@ -3788,7 +3788,7 @@
           <a:bodyPr wrap="square" lIns="0" tIns="0" rIns="0" bIns="0" rtlCol="0" anchor="ctr"/>
           <a:lstStyle/>
           <a:p>
-            <a:pPr algn="ctr" indent="0" marL="0">
+            <a:pPr eaLnBrk="0" algn="ctr" indent="0" marL="0">
               <a:buNone/>
             </a:pPr>
             <a:r>
@@ -3850,7 +3850,7 @@
           <a:bodyPr wrap="square" lIns="0" tIns="0" rIns="0" bIns="0" rtlCol="0" anchor="ctr"/>
           <a:lstStyle/>
           <a:p>
-            <a:pPr algn="ctr" indent="0" marL="0">
+            <a:pPr eaLnBrk="0" algn="ctr" indent="0" marL="0">
               <a:buNone/>
             </a:pPr>
             <a:r>
@@ -3913,7 +3913,7 @@
           <a:bodyPr wrap="square" lIns="0" tIns="0" rIns="0" bIns="0" rtlCol="0" anchor="ctr"/>
           <a:lstStyle/>
           <a:p>
-            <a:pPr algn="ctr" indent="0" marL="0">
+            <a:pPr eaLnBrk="0" algn="ctr" indent="0" marL="0">
               <a:buNone/>
             </a:pPr>
             <a:r>
@@ -3976,7 +3976,7 @@
           <a:bodyPr wrap="square" lIns="0" tIns="0" rIns="0" bIns="0" rtlCol="0" anchor="ctr"/>
           <a:lstStyle/>
           <a:p>
-            <a:pPr algn="ctr" indent="0" marL="0">
+            <a:pPr eaLnBrk="0" algn="ctr" indent="0" marL="0">
               <a:buNone/>
             </a:pPr>
             <a:r>
@@ -4015,7 +4015,7 @@
           <a:bodyPr wrap="square" lIns="0" tIns="0" rIns="0" bIns="0" rtlCol="0" anchor="ctr"/>
           <a:lstStyle/>
           <a:p>
-            <a:pPr algn="ctr" indent="0" marL="0">
+            <a:pPr eaLnBrk="0" algn="ctr" indent="0" marL="0">
               <a:buNone/>
             </a:pPr>
             <a:r>
@@ -4077,7 +4077,7 @@
           <a:bodyPr wrap="square" lIns="0" tIns="0" rIns="0" bIns="0" rtlCol="0" anchor="ctr"/>
           <a:lstStyle/>
           <a:p>
-            <a:pPr algn="ctr" indent="0" marL="0">
+            <a:pPr eaLnBrk="0" algn="ctr" indent="0" marL="0">
               <a:buNone/>
             </a:pPr>
             <a:r>
@@ -4193,7 +4193,7 @@
           <a:bodyPr wrap="square" lIns="0" tIns="0" rIns="0" bIns="0" rtlCol="0" anchor="ctr"/>
           <a:lstStyle/>
           <a:p>
-            <a:pPr algn="ctr" indent="0" marL="0">
+            <a:pPr eaLnBrk="0" algn="ctr" indent="0" marL="0">
               <a:buNone/>
             </a:pPr>
             <a:r>
@@ -4255,7 +4255,7 @@
           <a:bodyPr wrap="square" lIns="0" tIns="0" rIns="0" bIns="0" rtlCol="0" anchor="ctr"/>
           <a:lstStyle/>
           <a:p>
-            <a:pPr algn="ctr" indent="0" marL="0">
+            <a:pPr eaLnBrk="0" algn="ctr" indent="0" marL="0">
               <a:buNone/>
             </a:pPr>
             <a:r>
@@ -4446,7 +4446,7 @@
           <a:bodyPr wrap="square" lIns="0" tIns="0" rIns="0" bIns="0" rtlCol="0" anchor="ctr"/>
           <a:lstStyle/>
           <a:p>
-            <a:pPr indent="0" marL="0">
+            <a:pPr eaLnBrk="0" indent="0" marL="0">
               <a:spcAft>
                 <a:spcPts val="600"/>
               </a:spcAft>
@@ -4506,7 +4506,7 @@
             </a:lvl1pPr>
           </a:lstStyle>
           <a:p>
-            <a:pPr algn="r"/>
+            <a:pPr eaLnBrk="0" algn="r"/>
             <a:fld id="{F7021451-1387-4CA6-816F-3879F97B5CBC}" type="slidenum">
               <a:rPr b="0" lang="en-US"/>
               <a:t>10</a:t>
@@ -4563,7 +4563,7 @@
           <a:bodyPr wrap="square" lIns="0" tIns="0" rIns="0" bIns="0" rtlCol="0" anchor="ctr"/>
           <a:lstStyle/>
           <a:p>
-            <a:pPr algn="l" indent="0" marL="0">
+            <a:pPr eaLnBrk="0" algn="l" indent="0" marL="0">
               <a:buNone/>
             </a:pPr>
             <a:r>
@@ -4602,7 +4602,7 @@
           <a:bodyPr wrap="square" lIns="0" tIns="0" rIns="0" bIns="0" rtlCol="0" anchor="ctr"/>
           <a:lstStyle/>
           <a:p>
-            <a:pPr algn="l" indent="0" marL="0">
+            <a:pPr eaLnBrk="0" algn="l" indent="0" marL="0">
               <a:buNone/>
             </a:pPr>
             <a:r>
@@ -4641,7 +4641,7 @@
           <a:bodyPr wrap="square" lIns="0" tIns="0" rIns="0" bIns="0" rtlCol="0" anchor="ctr"/>
           <a:lstStyle/>
           <a:p>
-            <a:pPr algn="ctr" indent="0" marL="0">
+            <a:pPr eaLnBrk="0" algn="ctr" indent="0" marL="0">
               <a:buNone/>
             </a:pPr>
             <a:r>
@@ -4703,7 +4703,7 @@
           <a:bodyPr wrap="square" lIns="0" tIns="0" rIns="0" bIns="0" rtlCol="0" anchor="ctr"/>
           <a:lstStyle/>
           <a:p>
-            <a:pPr algn="ctr" indent="0" marL="0">
+            <a:pPr eaLnBrk="0" algn="ctr" indent="0" marL="0">
               <a:buNone/>
             </a:pPr>
             <a:r>
@@ -4742,7 +4742,7 @@
           <a:bodyPr wrap="square" lIns="0" tIns="0" rIns="0" bIns="0" rtlCol="0" anchor="ctr"/>
           <a:lstStyle/>
           <a:p>
-            <a:pPr algn="ctr" indent="0" marL="0">
+            <a:pPr eaLnBrk="0" algn="ctr" indent="0" marL="0">
               <a:buNone/>
             </a:pPr>
             <a:r>
@@ -4854,7 +4854,7 @@
           <a:bodyPr wrap="square" lIns="0" tIns="0" rIns="0" bIns="0" rtlCol="0" anchor="ctr"/>
           <a:lstStyle/>
           <a:p>
-            <a:pPr algn="ctr" indent="0" marL="0">
+            <a:pPr eaLnBrk="0" algn="ctr" indent="0" marL="0">
               <a:buNone/>
             </a:pPr>
             <a:r>
@@ -5120,7 +5120,7 @@
           <a:bodyPr wrap="square" lIns="0" tIns="0" rIns="0" bIns="0" rtlCol="0" anchor="ctr"/>
           <a:lstStyle/>
           <a:p>
-            <a:pPr indent="0" marL="0">
+            <a:pPr eaLnBrk="0" indent="0" marL="0">
               <a:spcAft>
                 <a:spcPts val="600"/>
               </a:spcAft>
@@ -5170,7 +5170,7 @@
           <a:bodyPr wrap="square" lIns="177800" tIns="0" rIns="177800" bIns="0" rtlCol="0" anchor="ctr"/>
           <a:lstStyle/>
           <a:p>
-            <a:pPr algn="l" indent="0" marL="0">
+            <a:pPr eaLnBrk="0" algn="l" indent="0" marL="0">
               <a:buNone/>
             </a:pPr>
             <a:r>
@@ -5227,7 +5227,7 @@
             </a:lvl1pPr>
           </a:lstStyle>
           <a:p>
-            <a:pPr algn="r"/>
+            <a:pPr eaLnBrk="0" algn="r"/>
             <a:fld id="{F7021451-1387-4CA6-816F-3879F97B5CBC}" type="slidenum">
               <a:rPr b="0" lang="en-US"/>
               <a:t>11</a:t>
@@ -5284,7 +5284,7 @@
           <a:bodyPr wrap="square" lIns="0" tIns="0" rIns="0" bIns="0" rtlCol="0" anchor="ctr"/>
           <a:lstStyle/>
           <a:p>
-            <a:pPr algn="l" indent="0" marL="0">
+            <a:pPr eaLnBrk="0" algn="l" indent="0" marL="0">
               <a:buNone/>
             </a:pPr>
             <a:r>
@@ -5331,7 +5331,7 @@
           <a:bodyPr wrap="square" lIns="177800" tIns="0" rIns="177800" bIns="0" rtlCol="0" anchor="ctr"/>
           <a:lstStyle/>
           <a:p>
-            <a:pPr algn="l" indent="0" marL="0">
+            <a:pPr eaLnBrk="0" algn="l" indent="0" marL="0">
               <a:buNone/>
             </a:pPr>
             <a:r>
@@ -5370,7 +5370,7 @@
           <a:bodyPr wrap="square" lIns="0" tIns="0" rIns="0" bIns="0" rtlCol="0" anchor="ctr"/>
           <a:lstStyle/>
           <a:p>
-            <a:pPr algn="ctr" indent="0" marL="0">
+            <a:pPr eaLnBrk="0" algn="ctr" indent="0" marL="0">
               <a:buNone/>
             </a:pPr>
             <a:r>
@@ -5432,7 +5432,7 @@
           <a:bodyPr wrap="square" lIns="0" tIns="0" rIns="0" bIns="0" rtlCol="0" anchor="ctr"/>
           <a:lstStyle/>
           <a:p>
-            <a:pPr algn="ctr" indent="0" marL="0">
+            <a:pPr eaLnBrk="0" algn="ctr" indent="0" marL="0">
               <a:buNone/>
             </a:pPr>
             <a:r>
@@ -5471,7 +5471,7 @@
           <a:bodyPr wrap="square" lIns="0" tIns="0" rIns="0" bIns="0" rtlCol="0" anchor="ctr"/>
           <a:lstStyle/>
           <a:p>
-            <a:pPr algn="ctr" indent="0" marL="0">
+            <a:pPr eaLnBrk="0" algn="ctr" indent="0" marL="0">
               <a:buNone/>
             </a:pPr>
             <a:r>
@@ -5510,7 +5510,7 @@
           <a:bodyPr wrap="square" lIns="0" tIns="0" rIns="0" bIns="0" rtlCol="0" anchor="ctr"/>
           <a:lstStyle/>
           <a:p>
-            <a:pPr algn="ctr" indent="0" marL="0">
+            <a:pPr eaLnBrk="0" algn="ctr" indent="0" marL="0">
               <a:buNone/>
             </a:pPr>
             <a:r>
@@ -5572,7 +5572,7 @@
           <a:bodyPr wrap="square" lIns="0" tIns="0" rIns="0" bIns="0" rtlCol="0" anchor="ctr"/>
           <a:lstStyle/>
           <a:p>
-            <a:pPr algn="ctr" indent="0" marL="0">
+            <a:pPr eaLnBrk="0" algn="ctr" indent="0" marL="0">
               <a:buNone/>
             </a:pPr>
             <a:r>
@@ -5611,7 +5611,7 @@
           <a:bodyPr wrap="square" lIns="0" tIns="0" rIns="0" bIns="0" rtlCol="0" anchor="ctr"/>
           <a:lstStyle/>
           <a:p>
-            <a:pPr algn="ctr" indent="0" marL="0">
+            <a:pPr eaLnBrk="0" algn="ctr" indent="0" marL="0">
               <a:buNone/>
             </a:pPr>
             <a:r>
@@ -5650,7 +5650,7 @@
           <a:bodyPr wrap="square" lIns="0" tIns="0" rIns="0" bIns="0" rtlCol="0" anchor="ctr"/>
           <a:lstStyle/>
           <a:p>
-            <a:pPr algn="ctr" indent="0" marL="0">
+            <a:pPr eaLnBrk="0" algn="ctr" indent="0" marL="0">
               <a:buNone/>
             </a:pPr>
             <a:r>
@@ -5712,7 +5712,7 @@
           <a:bodyPr wrap="square" lIns="0" tIns="0" rIns="0" bIns="0" rtlCol="0" anchor="ctr"/>
           <a:lstStyle/>
           <a:p>
-            <a:pPr algn="ctr" indent="0" marL="0">
+            <a:pPr eaLnBrk="0" algn="ctr" indent="0" marL="0">
               <a:buNone/>
             </a:pPr>
             <a:r>
@@ -5751,7 +5751,7 @@
           <a:bodyPr wrap="square" lIns="0" tIns="0" rIns="0" bIns="0" rtlCol="0" anchor="ctr"/>
           <a:lstStyle/>
           <a:p>
-            <a:pPr algn="ctr" indent="0" marL="0">
+            <a:pPr eaLnBrk="0" algn="ctr" indent="0" marL="0">
               <a:buNone/>
             </a:pPr>
             <a:r>
@@ -5790,7 +5790,7 @@
           <a:bodyPr wrap="square" lIns="0" tIns="0" rIns="0" bIns="0" rtlCol="0" anchor="ctr"/>
           <a:lstStyle/>
           <a:p>
-            <a:pPr algn="ctr" indent="0" marL="0">
+            <a:pPr eaLnBrk="0" algn="ctr" indent="0" marL="0">
               <a:buNone/>
             </a:pPr>
             <a:r>
@@ -5852,7 +5852,7 @@
           <a:bodyPr wrap="square" lIns="0" tIns="0" rIns="0" bIns="0" rtlCol="0" anchor="ctr"/>
           <a:lstStyle/>
           <a:p>
-            <a:pPr algn="ctr" indent="0" marL="0">
+            <a:pPr eaLnBrk="0" algn="ctr" indent="0" marL="0">
               <a:buNone/>
             </a:pPr>
             <a:r>
@@ -6245,7 +6245,7 @@
           <a:bodyPr wrap="square" lIns="0" tIns="0" rIns="0" bIns="0" rtlCol="0" anchor="ctr"/>
           <a:lstStyle/>
           <a:p>
-            <a:pPr algn="l" indent="0" marL="0">
+            <a:pPr eaLnBrk="0" algn="l" indent="0" marL="0">
               <a:buNone/>
             </a:pPr>
             <a:r>
@@ -6292,7 +6292,7 @@
           <a:bodyPr wrap="square" lIns="177800" tIns="0" rIns="177800" bIns="0" rtlCol="0" anchor="ctr"/>
           <a:lstStyle/>
           <a:p>
-            <a:pPr algn="l" indent="0" marL="0">
+            <a:pPr eaLnBrk="0" algn="l" indent="0" marL="0">
               <a:buNone/>
             </a:pPr>
             <a:r>
@@ -6331,7 +6331,7 @@
           <a:bodyPr wrap="square" lIns="0" tIns="0" rIns="0" bIns="0" rtlCol="0" anchor="ctr"/>
           <a:lstStyle/>
           <a:p>
-            <a:pPr algn="ctr" indent="0" marL="0">
+            <a:pPr eaLnBrk="0" algn="ctr" indent="0" marL="0">
               <a:buNone/>
             </a:pPr>
             <a:r>
@@ -6393,7 +6393,7 @@
           <a:bodyPr wrap="square" lIns="0" tIns="0" rIns="0" bIns="0" rtlCol="0" anchor="ctr"/>
           <a:lstStyle/>
           <a:p>
-            <a:pPr algn="ctr" indent="0" marL="0">
+            <a:pPr eaLnBrk="0" algn="ctr" indent="0" marL="0">
               <a:buNone/>
             </a:pPr>
             <a:r>
@@ -6432,7 +6432,7 @@
           <a:bodyPr wrap="square" lIns="0" tIns="0" rIns="0" bIns="0" rtlCol="0" anchor="ctr"/>
           <a:lstStyle/>
           <a:p>
-            <a:pPr algn="ctr" indent="0" marL="0">
+            <a:pPr eaLnBrk="0" algn="ctr" indent="0" marL="0">
               <a:buNone/>
             </a:pPr>
             <a:r>
@@ -6471,7 +6471,7 @@
           <a:bodyPr wrap="square" lIns="0" tIns="0" rIns="0" bIns="0" rtlCol="0" anchor="ctr"/>
           <a:lstStyle/>
           <a:p>
-            <a:pPr algn="ctr" indent="0" marL="0">
+            <a:pPr eaLnBrk="0" algn="ctr" indent="0" marL="0">
               <a:buNone/>
             </a:pPr>
             <a:r>
@@ -6533,7 +6533,7 @@
           <a:bodyPr wrap="square" lIns="0" tIns="0" rIns="0" bIns="0" rtlCol="0" anchor="ctr"/>
           <a:lstStyle/>
           <a:p>
-            <a:pPr algn="ctr" indent="0" marL="0">
+            <a:pPr eaLnBrk="0" algn="ctr" indent="0" marL="0">
               <a:buNone/>
             </a:pPr>
             <a:r>
@@ -6572,7 +6572,7 @@
           <a:bodyPr wrap="square" lIns="0" tIns="0" rIns="0" bIns="0" rtlCol="0" anchor="ctr"/>
           <a:lstStyle/>
           <a:p>
-            <a:pPr algn="l" indent="0" marL="0">
+            <a:pPr eaLnBrk="0" algn="l" indent="0" marL="0">
               <a:buNone/>
             </a:pPr>
             <a:r>
@@ -6611,7 +6611,7 @@
           <a:bodyPr wrap="square" lIns="0" tIns="0" rIns="0" bIns="0" rtlCol="0" anchor="ctr"/>
           <a:lstStyle/>
           <a:p>
-            <a:pPr algn="ctr" indent="0" marL="0">
+            <a:pPr eaLnBrk="0" algn="ctr" indent="0" marL="0">
               <a:buNone/>
             </a:pPr>
             <a:r>
@@ -6673,7 +6673,7 @@
           <a:bodyPr wrap="square" lIns="0" tIns="0" rIns="0" bIns="0" rtlCol="0" anchor="ctr"/>
           <a:lstStyle/>
           <a:p>
-            <a:pPr algn="ctr" indent="0" marL="0">
+            <a:pPr eaLnBrk="0" algn="ctr" indent="0" marL="0">
               <a:buNone/>
             </a:pPr>
             <a:r>
@@ -6712,7 +6712,7 @@
           <a:bodyPr wrap="square" lIns="0" tIns="0" rIns="0" bIns="0" rtlCol="0" anchor="ctr"/>
           <a:lstStyle/>
           <a:p>
-            <a:pPr algn="ctr" indent="0" marL="0">
+            <a:pPr eaLnBrk="0" algn="ctr" indent="0" marL="0">
               <a:buNone/>
             </a:pPr>
             <a:r>
@@ -6751,7 +6751,7 @@
           <a:bodyPr wrap="square" lIns="0" tIns="0" rIns="0" bIns="0" rtlCol="0" anchor="ctr"/>
           <a:lstStyle/>
           <a:p>
-            <a:pPr algn="ctr" indent="0" marL="0">
+            <a:pPr eaLnBrk="0" algn="ctr" indent="0" marL="0">
               <a:buNone/>
             </a:pPr>
             <a:r>
@@ -6813,7 +6813,7 @@
           <a:bodyPr wrap="square" lIns="0" tIns="0" rIns="0" bIns="0" rtlCol="0" anchor="ctr"/>
           <a:lstStyle/>
           <a:p>
-            <a:pPr algn="ctr" indent="0" marL="0">
+            <a:pPr eaLnBrk="0" algn="ctr" indent="0" marL="0">
               <a:buNone/>
             </a:pPr>
             <a:r>
@@ -6852,7 +6852,7 @@
           <a:bodyPr wrap="square" lIns="0" tIns="0" rIns="0" bIns="0" rtlCol="0" anchor="ctr"/>
           <a:lstStyle/>
           <a:p>
-            <a:pPr algn="l" indent="0" marL="0">
+            <a:pPr eaLnBrk="0" algn="l" indent="0" marL="0">
               <a:buNone/>
             </a:pPr>
             <a:r>
@@ -6891,7 +6891,7 @@
           <a:bodyPr wrap="square" lIns="0" tIns="0" rIns="0" bIns="0" rtlCol="0" anchor="ctr"/>
           <a:lstStyle/>
           <a:p>
-            <a:pPr algn="ctr" indent="0" marL="0">
+            <a:pPr eaLnBrk="0" algn="ctr" indent="0" marL="0">
               <a:buNone/>
             </a:pPr>
             <a:r>
@@ -6953,7 +6953,7 @@
           <a:bodyPr wrap="square" lIns="0" tIns="0" rIns="0" bIns="0" rtlCol="0" anchor="ctr"/>
           <a:lstStyle/>
           <a:p>
-            <a:pPr algn="ctr" indent="0" marL="0">
+            <a:pPr eaLnBrk="0" algn="ctr" indent="0" marL="0">
               <a:buNone/>
             </a:pPr>
             <a:r>
@@ -6992,7 +6992,7 @@
           <a:bodyPr wrap="square" lIns="0" tIns="0" rIns="0" bIns="0" rtlCol="0" anchor="ctr"/>
           <a:lstStyle/>
           <a:p>
-            <a:pPr algn="ctr" indent="0" marL="0">
+            <a:pPr eaLnBrk="0" algn="ctr" indent="0" marL="0">
               <a:buNone/>
             </a:pPr>
             <a:r>
@@ -7031,7 +7031,7 @@
           <a:bodyPr wrap="square" lIns="0" tIns="0" rIns="0" bIns="0" rtlCol="0" anchor="ctr"/>
           <a:lstStyle/>
           <a:p>
-            <a:pPr algn="ctr" indent="0" marL="0">
+            <a:pPr eaLnBrk="0" algn="ctr" indent="0" marL="0">
               <a:buNone/>
             </a:pPr>
             <a:r>
@@ -7093,7 +7093,7 @@
           <a:bodyPr wrap="square" lIns="0" tIns="0" rIns="0" bIns="0" rtlCol="0" anchor="ctr"/>
           <a:lstStyle/>
           <a:p>
-            <a:pPr algn="ctr" indent="0" marL="0">
+            <a:pPr eaLnBrk="0" algn="ctr" indent="0" marL="0">
               <a:buNone/>
             </a:pPr>
             <a:r>
@@ -7132,7 +7132,7 @@
           <a:bodyPr wrap="square" lIns="0" tIns="0" rIns="0" bIns="0" rtlCol="0" anchor="ctr"/>
           <a:lstStyle/>
           <a:p>
-            <a:pPr algn="l" indent="0" marL="0">
+            <a:pPr eaLnBrk="0" algn="l" indent="0" marL="0">
               <a:buNone/>
             </a:pPr>
             <a:r>
@@ -7189,7 +7189,7 @@
             </a:lvl1pPr>
           </a:lstStyle>
           <a:p>
-            <a:pPr algn="r"/>
+            <a:pPr eaLnBrk="0" algn="r"/>
             <a:fld id="{F7021451-1387-4CA6-816F-3879F97B5CBC}" type="slidenum">
               <a:rPr b="0" lang="en-US"/>
               <a:t>12</a:t>
@@ -7246,7 +7246,7 @@
           <a:bodyPr wrap="square" lIns="0" tIns="0" rIns="0" bIns="0" rtlCol="0" anchor="ctr"/>
           <a:lstStyle/>
           <a:p>
-            <a:pPr algn="l" indent="0" marL="0">
+            <a:pPr eaLnBrk="0" algn="l" indent="0" marL="0">
               <a:buNone/>
             </a:pPr>
             <a:r>
@@ -7285,7 +7285,7 @@
           <a:bodyPr wrap="square" lIns="0" tIns="0" rIns="0" bIns="0" rtlCol="0" anchor="ctr"/>
           <a:lstStyle/>
           <a:p>
-            <a:pPr algn="l" indent="0" marL="0">
+            <a:pPr eaLnBrk="0" algn="l" indent="0" marL="0">
               <a:buNone/>
             </a:pPr>
             <a:r>
@@ -7324,7 +7324,7 @@
           <a:bodyPr wrap="square" lIns="0" tIns="0" rIns="0" bIns="0" rtlCol="0" anchor="ctr"/>
           <a:lstStyle/>
           <a:p>
-            <a:pPr algn="ctr" indent="0" marL="0">
+            <a:pPr eaLnBrk="0" algn="ctr" indent="0" marL="0">
               <a:buNone/>
             </a:pPr>
             <a:r>
@@ -7386,7 +7386,7 @@
           <a:bodyPr wrap="square" lIns="0" tIns="0" rIns="0" bIns="0" rtlCol="0" anchor="ctr"/>
           <a:lstStyle/>
           <a:p>
-            <a:pPr algn="ctr" indent="0" marL="0">
+            <a:pPr eaLnBrk="0" algn="ctr" indent="0" marL="0">
               <a:buNone/>
             </a:pPr>
             <a:r>
@@ -7535,7 +7535,7 @@
           <a:bodyPr wrap="square" lIns="0" tIns="0" rIns="0" bIns="0" rtlCol="0" anchor="ctr"/>
           <a:lstStyle/>
           <a:p>
-            <a:pPr algn="ctr" indent="0" marL="0">
+            <a:pPr eaLnBrk="0" algn="ctr" indent="0" marL="0">
               <a:buNone/>
             </a:pPr>
             <a:r>
@@ -7759,7 +7759,7 @@
           <a:bodyPr wrap="square" lIns="0" tIns="0" rIns="0" bIns="0" rtlCol="0" anchor="ctr"/>
           <a:lstStyle/>
           <a:p>
-            <a:pPr algn="ctr" indent="0" marL="0">
+            <a:pPr eaLnBrk="0" algn="ctr" indent="0" marL="0">
               <a:buNone/>
             </a:pPr>
             <a:r>
@@ -7983,7 +7983,7 @@
           <a:bodyPr wrap="square" lIns="0" tIns="0" rIns="0" bIns="0" rtlCol="0" anchor="ctr"/>
           <a:lstStyle/>
           <a:p>
-            <a:pPr algn="ctr" indent="0" marL="0">
+            <a:pPr eaLnBrk="0" algn="ctr" indent="0" marL="0">
               <a:buNone/>
             </a:pPr>
             <a:r>
@@ -8167,7 +8167,7 @@
             </a:lvl1pPr>
           </a:lstStyle>
           <a:p>
-            <a:pPr algn="r"/>
+            <a:pPr eaLnBrk="0" algn="r"/>
             <a:fld id="{F7021451-1387-4CA6-816F-3879F97B5CBC}" type="slidenum">
               <a:rPr b="0" lang="en-US"/>
               <a:t>13</a:t>
@@ -8224,7 +8224,7 @@
           <a:bodyPr wrap="square" lIns="0" tIns="0" rIns="0" bIns="0" rtlCol="0" anchor="ctr"/>
           <a:lstStyle/>
           <a:p>
-            <a:pPr algn="l" indent="0" marL="0">
+            <a:pPr eaLnBrk="0" algn="l" indent="0" marL="0">
               <a:buNone/>
             </a:pPr>
             <a:r>
@@ -8290,7 +8290,7 @@
           <a:bodyPr wrap="square" lIns="0" tIns="0" rIns="0" bIns="0" rtlCol="0" anchor="ctr"/>
           <a:lstStyle/>
           <a:p>
-            <a:pPr indent="0" marL="0">
+            <a:pPr eaLnBrk="0" indent="0" marL="0">
               <a:spcAft>
                 <a:spcPts val="600"/>
               </a:spcAft>
@@ -8340,7 +8340,7 @@
           <a:bodyPr wrap="square" lIns="177800" tIns="0" rIns="177800" bIns="0" rtlCol="0" anchor="ctr"/>
           <a:lstStyle/>
           <a:p>
-            <a:pPr algn="l" indent="0" marL="0">
+            <a:pPr eaLnBrk="0" algn="l" indent="0" marL="0">
               <a:buNone/>
             </a:pPr>
             <a:r>
@@ -8387,7 +8387,7 @@
           <a:bodyPr wrap="square" lIns="177800" tIns="0" rIns="177800" bIns="0" rtlCol="0" anchor="ctr"/>
           <a:lstStyle/>
           <a:p>
-            <a:pPr algn="l" indent="0" marL="0">
+            <a:pPr eaLnBrk="0" algn="l" indent="0" marL="0">
               <a:buNone/>
             </a:pPr>
             <a:r>
@@ -8426,7 +8426,7 @@
           <a:bodyPr wrap="square" lIns="0" tIns="0" rIns="0" bIns="0" rtlCol="0" anchor="ctr"/>
           <a:lstStyle/>
           <a:p>
-            <a:pPr algn="l" indent="0" marL="0">
+            <a:pPr eaLnBrk="0" algn="l" indent="0" marL="0">
               <a:buNone/>
             </a:pPr>
             <a:r>
@@ -8465,7 +8465,7 @@
           <a:bodyPr wrap="square" lIns="0" tIns="0" rIns="0" bIns="0" rtlCol="0" anchor="ctr"/>
           <a:lstStyle/>
           <a:p>
-            <a:pPr algn="ctr" indent="0" marL="0">
+            <a:pPr eaLnBrk="0" algn="ctr" indent="0" marL="0">
               <a:buNone/>
             </a:pPr>
             <a:r>
@@ -8504,7 +8504,7 @@
           <a:bodyPr wrap="square" lIns="0" tIns="0" rIns="0" bIns="0" rtlCol="0" anchor="ctr"/>
           <a:lstStyle/>
           <a:p>
-            <a:pPr algn="ctr" indent="0" marL="0">
+            <a:pPr eaLnBrk="0" algn="ctr" indent="0" marL="0">
               <a:buNone/>
             </a:pPr>
             <a:r>
@@ -8566,7 +8566,7 @@
           <a:bodyPr wrap="square" lIns="0" tIns="0" rIns="0" bIns="0" rtlCol="0" anchor="ctr"/>
           <a:lstStyle/>
           <a:p>
-            <a:pPr algn="ctr" indent="0" marL="0">
+            <a:pPr eaLnBrk="0" algn="ctr" indent="0" marL="0">
               <a:buNone/>
             </a:pPr>
             <a:r>
@@ -8605,7 +8605,7 @@
           <a:bodyPr wrap="square" lIns="0" tIns="0" rIns="0" bIns="0" rtlCol="0" anchor="ctr"/>
           <a:lstStyle/>
           <a:p>
-            <a:pPr algn="ctr" indent="0" marL="0">
+            <a:pPr eaLnBrk="0" algn="ctr" indent="0" marL="0">
               <a:buNone/>
             </a:pPr>
             <a:r>
@@ -8692,7 +8692,7 @@
           <a:bodyPr wrap="square" lIns="0" tIns="0" rIns="0" bIns="0" rtlCol="0" anchor="ctr"/>
           <a:lstStyle/>
           <a:p>
-            <a:pPr algn="ctr" indent="0" marL="0">
+            <a:pPr eaLnBrk="0" algn="ctr" indent="0" marL="0">
               <a:buNone/>
             </a:pPr>
             <a:r>
@@ -8731,7 +8731,7 @@
           <a:bodyPr wrap="square" lIns="0" tIns="0" rIns="0" bIns="0" rtlCol="0" anchor="ctr"/>
           <a:lstStyle/>
           <a:p>
-            <a:pPr algn="ctr" indent="0" marL="0">
+            <a:pPr eaLnBrk="0" algn="ctr" indent="0" marL="0">
               <a:buNone/>
             </a:pPr>
             <a:r>
@@ -8770,7 +8770,7 @@
           <a:bodyPr wrap="square" lIns="0" tIns="0" rIns="0" bIns="0" rtlCol="0" anchor="ctr"/>
           <a:lstStyle/>
           <a:p>
-            <a:pPr algn="ctr" indent="0" marL="0">
+            <a:pPr eaLnBrk="0" algn="ctr" indent="0" marL="0">
               <a:buNone/>
             </a:pPr>
             <a:r>
@@ -8832,7 +8832,7 @@
           <a:bodyPr wrap="square" lIns="0" tIns="0" rIns="0" bIns="0" rtlCol="0" anchor="ctr"/>
           <a:lstStyle/>
           <a:p>
-            <a:pPr algn="ctr" indent="0" marL="0">
+            <a:pPr eaLnBrk="0" algn="ctr" indent="0" marL="0">
               <a:buNone/>
             </a:pPr>
             <a:r>
@@ -8871,7 +8871,7 @@
           <a:bodyPr wrap="square" lIns="0" tIns="0" rIns="0" bIns="0" rtlCol="0" anchor="ctr"/>
           <a:lstStyle/>
           <a:p>
-            <a:pPr algn="ctr" indent="0" marL="0">
+            <a:pPr eaLnBrk="0" algn="ctr" indent="0" marL="0">
               <a:buNone/>
             </a:pPr>
             <a:r>
@@ -8910,7 +8910,7 @@
           <a:bodyPr wrap="square" lIns="0" tIns="0" rIns="0" bIns="0" rtlCol="0" anchor="ctr"/>
           <a:lstStyle/>
           <a:p>
-            <a:pPr algn="ctr" indent="0" marL="0">
+            <a:pPr eaLnBrk="0" algn="ctr" indent="0" marL="0">
               <a:buNone/>
             </a:pPr>
             <a:r>
@@ -8997,7 +8997,7 @@
           <a:bodyPr wrap="square" lIns="0" tIns="0" rIns="0" bIns="0" rtlCol="0" anchor="ctr"/>
           <a:lstStyle/>
           <a:p>
-            <a:pPr algn="l" indent="0" marL="0">
+            <a:pPr eaLnBrk="0" algn="l" indent="0" marL="0">
               <a:buNone/>
             </a:pPr>
             <a:r>
@@ -9036,7 +9036,7 @@
           <a:bodyPr wrap="square" lIns="0" tIns="0" rIns="0" bIns="0" rtlCol="0" anchor="ctr"/>
           <a:lstStyle/>
           <a:p>
-            <a:pPr algn="l" indent="0" marL="0">
+            <a:pPr eaLnBrk="0" algn="l" indent="0" marL="0">
               <a:buNone/>
             </a:pPr>
             <a:r>
@@ -9093,7 +9093,7 @@
             </a:lvl1pPr>
           </a:lstStyle>
           <a:p>
-            <a:pPr algn="r"/>
+            <a:pPr eaLnBrk="0" algn="r"/>
             <a:fld id="{F7021451-1387-4CA6-816F-3879F97B5CBC}" type="slidenum">
               <a:rPr b="0" lang="en-US"/>
               <a:t>14</a:t>
@@ -9150,7 +9150,7 @@
           <a:bodyPr wrap="square" lIns="0" tIns="0" rIns="0" bIns="0" rtlCol="0" anchor="ctr"/>
           <a:lstStyle/>
           <a:p>
-            <a:pPr algn="l" indent="0" marL="0">
+            <a:pPr eaLnBrk="0" algn="l" indent="0" marL="0">
               <a:buNone/>
             </a:pPr>
             <a:r>
@@ -9316,7 +9316,7 @@
           <a:bodyPr wrap="square" lIns="0" tIns="0" rIns="0" bIns="0" rtlCol="0" anchor="ctr"/>
           <a:lstStyle/>
           <a:p>
-            <a:pPr algn="l" indent="0" marL="0">
+            <a:pPr eaLnBrk="0" algn="l" indent="0" marL="0">
               <a:buNone/>
             </a:pPr>
             <a:r>
@@ -9355,7 +9355,7 @@
           <a:bodyPr wrap="square" lIns="0" tIns="0" rIns="0" bIns="0" rtlCol="0" anchor="ctr"/>
           <a:lstStyle/>
           <a:p>
-            <a:pPr algn="ctr" indent="0" marL="0">
+            <a:pPr eaLnBrk="0" algn="ctr" indent="0" marL="0">
               <a:buNone/>
             </a:pPr>
             <a:r>
@@ -9417,7 +9417,7 @@
           <a:bodyPr wrap="square" lIns="0" tIns="0" rIns="0" bIns="0" rtlCol="0" anchor="ctr"/>
           <a:lstStyle/>
           <a:p>
-            <a:pPr algn="ctr" indent="0" marL="0">
+            <a:pPr eaLnBrk="0" algn="ctr" indent="0" marL="0">
               <a:buNone/>
             </a:pPr>
             <a:r>
@@ -9456,7 +9456,7 @@
           <a:bodyPr wrap="square" lIns="0" tIns="0" rIns="0" bIns="0" rtlCol="0" anchor="ctr"/>
           <a:lstStyle/>
           <a:p>
-            <a:pPr algn="l" indent="0" marL="0">
+            <a:pPr eaLnBrk="0" algn="l" indent="0" marL="0">
               <a:buNone/>
             </a:pPr>
             <a:r>
@@ -9495,7 +9495,7 @@
           <a:bodyPr wrap="square" lIns="0" tIns="0" rIns="0" bIns="0" rtlCol="0" anchor="ctr"/>
           <a:lstStyle/>
           <a:p>
-            <a:pPr algn="l" indent="0" marL="0">
+            <a:pPr eaLnBrk="0" algn="l" indent="0" marL="0">
               <a:buNone/>
             </a:pPr>
             <a:r>
@@ -9542,7 +9542,7 @@
           <a:bodyPr wrap="square" lIns="177800" tIns="0" rIns="177800" bIns="0" rtlCol="0" anchor="ctr"/>
           <a:lstStyle/>
           <a:p>
-            <a:pPr algn="l" indent="0" marL="0">
+            <a:pPr eaLnBrk="0" algn="l" indent="0" marL="0">
               <a:buNone/>
             </a:pPr>
             <a:r>
@@ -9683,7 +9683,7 @@
           <a:bodyPr wrap="square" lIns="0" tIns="0" rIns="0" bIns="0" rtlCol="0" anchor="ctr"/>
           <a:lstStyle/>
           <a:p>
-            <a:pPr algn="ctr" indent="0" marL="0">
+            <a:pPr eaLnBrk="0" algn="ctr" indent="0" marL="0">
               <a:buNone/>
             </a:pPr>
             <a:r>
@@ -9947,7 +9947,7 @@
           <a:bodyPr wrap="square" lIns="0" tIns="0" rIns="0" bIns="0" rtlCol="0" anchor="ctr"/>
           <a:lstStyle/>
           <a:p>
-            <a:pPr algn="ctr" indent="0" marL="0">
+            <a:pPr eaLnBrk="0" algn="ctr" indent="0" marL="0">
               <a:buNone/>
             </a:pPr>
             <a:r>
@@ -10077,7 +10077,7 @@
             </a:lvl1pPr>
           </a:lstStyle>
           <a:p>
-            <a:pPr algn="r"/>
+            <a:pPr eaLnBrk="0" algn="r"/>
             <a:fld id="{F7021451-1387-4CA6-816F-3879F97B5CBC}" type="slidenum">
               <a:rPr b="0" lang="en-US"/>
               <a:t>15</a:t>
@@ -10134,7 +10134,7 @@
           <a:bodyPr wrap="square" lIns="0" tIns="0" rIns="0" bIns="0" rtlCol="0" anchor="ctr"/>
           <a:lstStyle/>
           <a:p>
-            <a:pPr algn="l" indent="0" marL="0">
+            <a:pPr eaLnBrk="0" algn="l" indent="0" marL="0">
               <a:buNone/>
             </a:pPr>
             <a:r>
@@ -10173,7 +10173,7 @@
           <a:bodyPr wrap="square" lIns="0" tIns="0" rIns="0" bIns="0" rtlCol="0" anchor="ctr"/>
           <a:lstStyle/>
           <a:p>
-            <a:pPr algn="l" indent="0" marL="0">
+            <a:pPr eaLnBrk="0" algn="l" indent="0" marL="0">
               <a:buNone/>
             </a:pPr>
             <a:r>
@@ -10220,7 +10220,7 @@
           <a:bodyPr wrap="square" lIns="0" tIns="0" rIns="0" bIns="0" rtlCol="0" anchor="ctr"/>
           <a:lstStyle/>
           <a:p>
-            <a:pPr algn="ctr" indent="0" marL="0">
+            <a:pPr eaLnBrk="0" algn="ctr" indent="0" marL="0">
               <a:buNone/>
             </a:pPr>
             <a:r>
@@ -10394,7 +10394,7 @@
           <a:bodyPr wrap="square" lIns="0" tIns="0" rIns="0" bIns="0" rtlCol="0" anchor="ctr"/>
           <a:lstStyle/>
           <a:p>
-            <a:pPr algn="ctr" indent="0" marL="0">
+            <a:pPr eaLnBrk="0" algn="ctr" indent="0" marL="0">
               <a:buNone/>
             </a:pPr>
             <a:r>
@@ -10568,7 +10568,7 @@
           <a:bodyPr wrap="square" lIns="0" tIns="0" rIns="0" bIns="0" rtlCol="0" anchor="ctr"/>
           <a:lstStyle/>
           <a:p>
-            <a:pPr algn="ctr" indent="0" marL="0">
+            <a:pPr eaLnBrk="0" algn="ctr" indent="0" marL="0">
               <a:buNone/>
             </a:pPr>
             <a:r>
@@ -10717,7 +10717,7 @@
           <a:bodyPr wrap="square" lIns="0" tIns="0" rIns="0" bIns="0" rtlCol="0" anchor="ctr"/>
           <a:lstStyle/>
           <a:p>
-            <a:pPr algn="ctr" indent="0" marL="0">
+            <a:pPr eaLnBrk="0" algn="ctr" indent="0" marL="0">
               <a:buNone/>
             </a:pPr>
             <a:r>
@@ -10885,7 +10885,7 @@
           <a:bodyPr wrap="square" lIns="0" tIns="0" rIns="0" bIns="0" rtlCol="0" anchor="ctr"/>
           <a:lstStyle/>
           <a:p>
-            <a:pPr indent="0" marL="0">
+            <a:pPr eaLnBrk="0" indent="0" marL="0">
               <a:spcAft>
                 <a:spcPts val="600"/>
               </a:spcAft>
@@ -10945,7 +10945,7 @@
             </a:lvl1pPr>
           </a:lstStyle>
           <a:p>
-            <a:pPr algn="r"/>
+            <a:pPr eaLnBrk="0" algn="r"/>
             <a:fld id="{F7021451-1387-4CA6-816F-3879F97B5CBC}" type="slidenum">
               <a:rPr b="0" lang="en-US"/>
               <a:t>2</a:t>
@@ -11002,7 +11002,7 @@
           <a:bodyPr wrap="square" lIns="0" tIns="0" rIns="0" bIns="0" rtlCol="0" anchor="ctr"/>
           <a:lstStyle/>
           <a:p>
-            <a:pPr algn="l" indent="0" marL="0">
+            <a:pPr eaLnBrk="0" algn="l" indent="0" marL="0">
               <a:buNone/>
             </a:pPr>
             <a:r>
@@ -11041,7 +11041,7 @@
           <a:bodyPr wrap="square" lIns="0" tIns="0" rIns="0" bIns="0" rtlCol="0" anchor="ctr"/>
           <a:lstStyle/>
           <a:p>
-            <a:pPr algn="l" indent="0" marL="0">
+            <a:pPr eaLnBrk="0" algn="l" indent="0" marL="0">
               <a:buNone/>
             </a:pPr>
             <a:r>
@@ -11088,7 +11088,7 @@
           <a:bodyPr wrap="square" lIns="0" tIns="0" rIns="0" bIns="0" rtlCol="0" anchor="ctr"/>
           <a:lstStyle/>
           <a:p>
-            <a:pPr algn="ctr" indent="0" marL="0">
+            <a:pPr eaLnBrk="0" algn="ctr" indent="0" marL="0">
               <a:buNone/>
             </a:pPr>
             <a:r>
@@ -11204,7 +11204,7 @@
           <a:bodyPr wrap="square" lIns="0" tIns="0" rIns="0" bIns="0" rtlCol="0" anchor="ctr"/>
           <a:lstStyle/>
           <a:p>
-            <a:pPr algn="l" indent="0" marL="0">
+            <a:pPr eaLnBrk="0" algn="l" indent="0" marL="0">
               <a:buNone/>
             </a:pPr>
             <a:r>
@@ -11251,7 +11251,7 @@
           <a:bodyPr wrap="square" lIns="0" tIns="0" rIns="0" bIns="0" rtlCol="0" anchor="ctr"/>
           <a:lstStyle/>
           <a:p>
-            <a:pPr algn="ctr" indent="0" marL="0">
+            <a:pPr eaLnBrk="0" algn="ctr" indent="0" marL="0">
               <a:buNone/>
             </a:pPr>
             <a:r>
@@ -11417,7 +11417,7 @@
           <a:bodyPr wrap="square" lIns="0" tIns="0" rIns="0" bIns="0" rtlCol="0" anchor="ctr"/>
           <a:lstStyle/>
           <a:p>
-            <a:pPr algn="l" indent="0" marL="0">
+            <a:pPr eaLnBrk="0" algn="l" indent="0" marL="0">
               <a:buNone/>
             </a:pPr>
             <a:r>
@@ -11483,7 +11483,7 @@
           <a:bodyPr wrap="square" lIns="0" tIns="0" rIns="0" bIns="0" rtlCol="0" anchor="ctr"/>
           <a:lstStyle/>
           <a:p>
-            <a:pPr indent="0" marL="0">
+            <a:pPr eaLnBrk="0" indent="0" marL="0">
               <a:spcAft>
                 <a:spcPts val="600"/>
               </a:spcAft>
@@ -11543,7 +11543,7 @@
             </a:lvl1pPr>
           </a:lstStyle>
           <a:p>
-            <a:pPr algn="r"/>
+            <a:pPr eaLnBrk="0" algn="r"/>
             <a:fld id="{F7021451-1387-4CA6-816F-3879F97B5CBC}" type="slidenum">
               <a:rPr b="0" lang="en-US"/>
               <a:t>3</a:t>
@@ -11600,7 +11600,7 @@
           <a:bodyPr wrap="square" lIns="0" tIns="0" rIns="0" bIns="0" rtlCol="0" anchor="ctr"/>
           <a:lstStyle/>
           <a:p>
-            <a:pPr algn="l" indent="0" marL="0">
+            <a:pPr eaLnBrk="0" algn="l" indent="0" marL="0">
               <a:buNone/>
             </a:pPr>
             <a:r>
@@ -11645,7 +11645,7 @@
           <a:bodyPr wrap="square" lIns="0" tIns="0" rIns="0" bIns="0" rtlCol="0" anchor="ctr"/>
           <a:lstStyle/>
           <a:p>
-            <a:pPr algn="ctr" indent="0" marL="0">
+            <a:pPr eaLnBrk="0" algn="ctr" indent="0" marL="0">
               <a:buNone/>
             </a:pPr>
             <a:r>
@@ -11684,7 +11684,7 @@
           <a:bodyPr wrap="square" lIns="0" tIns="0" rIns="0" bIns="0" rtlCol="0" anchor="t"/>
           <a:lstStyle/>
           <a:p>
-            <a:pPr indent="0" marL="0">
+            <a:pPr eaLnBrk="0" indent="0" marL="0">
               <a:buNone/>
             </a:pPr>
             <a:r>
@@ -11701,7 +11701,7 @@
             <a:endParaRPr lang="ko-KR" sz="2800" dirty="0"/>
           </a:p>
           <a:p>
-            <a:pPr indent="0" marL="0">
+            <a:pPr eaLnBrk="0" indent="0" marL="0">
               <a:buNone/>
             </a:pPr>
             <a:r>
@@ -11746,7 +11746,7 @@
           <a:bodyPr wrap="square" lIns="0" tIns="0" rIns="0" bIns="0" rtlCol="0" anchor="ctr"/>
           <a:lstStyle/>
           <a:p>
-            <a:pPr algn="ctr" indent="0" marL="0">
+            <a:pPr eaLnBrk="0" algn="ctr" indent="0" marL="0">
               <a:buNone/>
             </a:pPr>
             <a:r>
@@ -11785,7 +11785,7 @@
           <a:bodyPr wrap="square" lIns="0" tIns="0" rIns="0" bIns="0" rtlCol="0" anchor="t"/>
           <a:lstStyle/>
           <a:p>
-            <a:pPr indent="0" marL="0">
+            <a:pPr eaLnBrk="0" indent="0" marL="0">
               <a:buNone/>
             </a:pPr>
             <a:r>
@@ -11830,7 +11830,7 @@
           <a:bodyPr wrap="square" lIns="0" tIns="0" rIns="0" bIns="0" rtlCol="0" anchor="ctr"/>
           <a:lstStyle/>
           <a:p>
-            <a:pPr algn="ctr" indent="0" marL="0">
+            <a:pPr eaLnBrk="0" algn="ctr" indent="0" marL="0">
               <a:buNone/>
             </a:pPr>
             <a:r>
@@ -11869,7 +11869,7 @@
           <a:bodyPr wrap="square" lIns="0" tIns="0" rIns="0" bIns="0" rtlCol="0" anchor="t"/>
           <a:lstStyle/>
           <a:p>
-            <a:pPr indent="0" marL="0">
+            <a:pPr eaLnBrk="0" indent="0" marL="0">
               <a:buNone/>
             </a:pPr>
             <a:r>
@@ -11914,7 +11914,7 @@
           <a:bodyPr wrap="square" lIns="0" tIns="0" rIns="0" bIns="0" rtlCol="0" anchor="ctr"/>
           <a:lstStyle/>
           <a:p>
-            <a:pPr algn="ctr" indent="0" marL="0">
+            <a:pPr eaLnBrk="0" algn="ctr" indent="0" marL="0">
               <a:buNone/>
             </a:pPr>
             <a:r>
@@ -11953,7 +11953,7 @@
           <a:bodyPr wrap="square" lIns="0" tIns="0" rIns="0" bIns="0" rtlCol="0" anchor="t"/>
           <a:lstStyle/>
           <a:p>
-            <a:pPr indent="0" marL="0">
+            <a:pPr eaLnBrk="0" indent="0" marL="0">
               <a:buNone/>
             </a:pPr>
             <a:r>
@@ -11970,7 +11970,7 @@
             <a:endParaRPr lang="ko-KR" sz="2800" dirty="0"/>
           </a:p>
           <a:p>
-            <a:pPr indent="0" marL="0">
+            <a:pPr eaLnBrk="0" indent="0" marL="0">
               <a:buNone/>
             </a:pPr>
             <a:r>
@@ -12348,7 +12348,7 @@
           <a:bodyPr wrap="square" lIns="177800" tIns="0" rIns="177800" bIns="0" rtlCol="0" anchor="ctr"/>
           <a:lstStyle/>
           <a:p>
-            <a:pPr algn="l" indent="0" marL="0">
+            <a:pPr eaLnBrk="0" algn="l" indent="0" marL="0">
               <a:buNone/>
             </a:pPr>
             <a:r>
@@ -12387,7 +12387,7 @@
           <a:bodyPr wrap="square" lIns="0" tIns="0" rIns="0" bIns="0" rtlCol="0" anchor="ctr"/>
           <a:lstStyle/>
           <a:p>
-            <a:pPr algn="l" indent="0" marL="0">
+            <a:pPr eaLnBrk="0" algn="l" indent="0" marL="0">
               <a:buNone/>
             </a:pPr>
             <a:r>
@@ -12444,7 +12444,7 @@
             </a:lvl1pPr>
           </a:lstStyle>
           <a:p>
-            <a:pPr algn="r"/>
+            <a:pPr eaLnBrk="0" algn="r"/>
             <a:fld id="{F7021451-1387-4CA6-816F-3879F97B5CBC}" type="slidenum">
               <a:rPr b="0" lang="en-US"/>
               <a:t>4</a:t>
@@ -12501,7 +12501,7 @@
           <a:bodyPr wrap="square" lIns="0" tIns="0" rIns="0" bIns="0" rtlCol="0" anchor="ctr"/>
           <a:lstStyle/>
           <a:p>
-            <a:pPr algn="l" indent="0" marL="0">
+            <a:pPr eaLnBrk="0" algn="l" indent="0" marL="0">
               <a:buNone/>
             </a:pPr>
             <a:r>
@@ -12540,7 +12540,7 @@
           <a:bodyPr wrap="square" lIns="0" tIns="0" rIns="0" bIns="0" rtlCol="0" anchor="ctr"/>
           <a:lstStyle/>
           <a:p>
-            <a:pPr algn="ctr" indent="0" marL="0">
+            <a:pPr eaLnBrk="0" algn="ctr" indent="0" marL="0">
               <a:buNone/>
             </a:pPr>
             <a:r>
@@ -12602,7 +12602,7 @@
           <a:bodyPr wrap="square" lIns="0" tIns="0" rIns="0" bIns="0" rtlCol="0" anchor="ctr"/>
           <a:lstStyle/>
           <a:p>
-            <a:pPr algn="ctr" indent="0" marL="0">
+            <a:pPr eaLnBrk="0" algn="ctr" indent="0" marL="0">
               <a:buNone/>
             </a:pPr>
             <a:r>
@@ -12718,7 +12718,7 @@
           <a:bodyPr wrap="square" lIns="0" tIns="0" rIns="0" bIns="0" rtlCol="0" anchor="ctr"/>
           <a:lstStyle/>
           <a:p>
-            <a:pPr algn="ctr" indent="0" marL="0">
+            <a:pPr eaLnBrk="0" algn="ctr" indent="0" marL="0">
               <a:buNone/>
             </a:pPr>
             <a:r>
@@ -12780,7 +12780,7 @@
           <a:bodyPr wrap="square" lIns="0" tIns="0" rIns="0" bIns="0" rtlCol="0" anchor="ctr"/>
           <a:lstStyle/>
           <a:p>
-            <a:pPr algn="ctr" indent="0" marL="0">
+            <a:pPr eaLnBrk="0" algn="ctr" indent="0" marL="0">
               <a:buNone/>
             </a:pPr>
             <a:r>
@@ -12996,7 +12996,7 @@
           <a:bodyPr wrap="square" lIns="0" tIns="0" rIns="0" bIns="0" rtlCol="0" anchor="ctr"/>
           <a:lstStyle/>
           <a:p>
-            <a:pPr indent="0" marL="0">
+            <a:pPr eaLnBrk="0" indent="0" marL="0">
               <a:spcAft>
                 <a:spcPts val="600"/>
               </a:spcAft>
@@ -13016,7 +13016,7 @@
             <a:endParaRPr lang="ko-KR" sz="2800" dirty="0"/>
           </a:p>
           <a:p>
-            <a:pPr indent="0" marL="0">
+            <a:pPr eaLnBrk="0" indent="0" marL="0">
               <a:spcAft>
                 <a:spcPts val="600"/>
               </a:spcAft>
@@ -13085,7 +13085,7 @@
           <a:bodyPr wrap="square" lIns="0" tIns="0" rIns="0" bIns="0" rtlCol="0" anchor="ctr"/>
           <a:lstStyle/>
           <a:p>
-            <a:pPr indent="0" marL="0">
+            <a:pPr eaLnBrk="0" indent="0" marL="0">
               <a:spcAft>
                 <a:spcPts val="600"/>
               </a:spcAft>
@@ -13105,7 +13105,7 @@
             <a:endParaRPr lang="ko-KR" sz="2800" dirty="0"/>
           </a:p>
           <a:p>
-            <a:pPr indent="0" marL="0">
+            <a:pPr eaLnBrk="0" indent="0" marL="0">
               <a:spcAft>
                 <a:spcPts val="600"/>
               </a:spcAft>
@@ -13174,7 +13174,7 @@
           <a:bodyPr wrap="square" lIns="0" tIns="0" rIns="0" bIns="0" rtlCol="0" anchor="ctr"/>
           <a:lstStyle/>
           <a:p>
-            <a:pPr indent="0" marL="0">
+            <a:pPr eaLnBrk="0" indent="0" marL="0">
               <a:spcAft>
                 <a:spcPts val="600"/>
               </a:spcAft>
@@ -13194,7 +13194,7 @@
             <a:endParaRPr lang="ko-KR" sz="2800" dirty="0"/>
           </a:p>
           <a:p>
-            <a:pPr indent="0" marL="0">
+            <a:pPr eaLnBrk="0" indent="0" marL="0">
               <a:spcAft>
                 <a:spcPts val="600"/>
               </a:spcAft>
@@ -13254,7 +13254,7 @@
             </a:lvl1pPr>
           </a:lstStyle>
           <a:p>
-            <a:pPr algn="r"/>
+            <a:pPr eaLnBrk="0" algn="r"/>
             <a:fld id="{F7021451-1387-4CA6-816F-3879F97B5CBC}" type="slidenum">
               <a:rPr b="0" lang="en-US"/>
               <a:t>5</a:t>
@@ -13311,7 +13311,7 @@
           <a:bodyPr wrap="square" lIns="0" tIns="0" rIns="0" bIns="0" rtlCol="0" anchor="ctr"/>
           <a:lstStyle/>
           <a:p>
-            <a:pPr algn="l" indent="0" marL="0">
+            <a:pPr eaLnBrk="0" algn="l" indent="0" marL="0">
               <a:buNone/>
             </a:pPr>
             <a:r>
@@ -13350,7 +13350,7 @@
           <a:bodyPr wrap="square" lIns="0" tIns="0" rIns="0" bIns="0" rtlCol="0" anchor="ctr"/>
           <a:lstStyle/>
           <a:p>
-            <a:pPr algn="ctr" indent="0" marL="0">
+            <a:pPr eaLnBrk="0" algn="ctr" indent="0" marL="0">
               <a:buNone/>
             </a:pPr>
             <a:r>
@@ -13412,7 +13412,7 @@
           <a:bodyPr wrap="square" lIns="0" tIns="0" rIns="0" bIns="0" rtlCol="0" anchor="ctr"/>
           <a:lstStyle/>
           <a:p>
-            <a:pPr algn="ctr" indent="0" marL="0">
+            <a:pPr eaLnBrk="0" algn="ctr" indent="0" marL="0">
               <a:buNone/>
             </a:pPr>
             <a:r>
@@ -13528,7 +13528,7 @@
           <a:bodyPr wrap="square" lIns="0" tIns="0" rIns="0" bIns="0" rtlCol="0" anchor="ctr"/>
           <a:lstStyle/>
           <a:p>
-            <a:pPr algn="ctr" indent="0" marL="0">
+            <a:pPr eaLnBrk="0" algn="ctr" indent="0" marL="0">
               <a:buNone/>
             </a:pPr>
             <a:r>
@@ -13590,7 +13590,7 @@
           <a:bodyPr wrap="square" lIns="0" tIns="0" rIns="0" bIns="0" rtlCol="0" anchor="ctr"/>
           <a:lstStyle/>
           <a:p>
-            <a:pPr algn="ctr" indent="0" marL="0">
+            <a:pPr eaLnBrk="0" algn="ctr" indent="0" marL="0">
               <a:buNone/>
             </a:pPr>
             <a:r>
@@ -13756,7 +13756,7 @@
           <a:bodyPr wrap="square" lIns="0" tIns="0" rIns="0" bIns="0" rtlCol="0" anchor="ctr"/>
           <a:lstStyle/>
           <a:p>
-            <a:pPr algn="ctr" indent="0" marL="0">
+            <a:pPr eaLnBrk="0" algn="ctr" indent="0" marL="0">
               <a:buNone/>
             </a:pPr>
             <a:r>
@@ -13818,7 +13818,7 @@
           <a:bodyPr wrap="square" lIns="0" tIns="0" rIns="0" bIns="0" rtlCol="0" anchor="ctr"/>
           <a:lstStyle/>
           <a:p>
-            <a:pPr algn="ctr" indent="0" marL="0">
+            <a:pPr eaLnBrk="0" algn="ctr" indent="0" marL="0">
               <a:buNone/>
             </a:pPr>
             <a:r>
@@ -14057,7 +14057,7 @@
           <a:bodyPr wrap="square" lIns="0" tIns="0" rIns="0" bIns="0" rtlCol="0" anchor="ctr"/>
           <a:lstStyle/>
           <a:p>
-            <a:pPr algn="ctr" indent="0" marL="0">
+            <a:pPr eaLnBrk="0" algn="ctr" indent="0" marL="0">
               <a:buNone/>
             </a:pPr>
             <a:r>
@@ -14119,7 +14119,7 @@
           <a:bodyPr wrap="square" lIns="0" tIns="0" rIns="0" bIns="0" rtlCol="0" anchor="ctr"/>
           <a:lstStyle/>
           <a:p>
-            <a:pPr algn="ctr" indent="0" marL="0">
+            <a:pPr eaLnBrk="0" algn="ctr" indent="0" marL="0">
               <a:buNone/>
             </a:pPr>
             <a:r>
@@ -14158,7 +14158,7 @@
           <a:bodyPr wrap="square" lIns="0" tIns="0" rIns="0" bIns="0" rtlCol="0" anchor="ctr"/>
           <a:lstStyle/>
           <a:p>
-            <a:pPr algn="ctr" indent="0" marL="0">
+            <a:pPr eaLnBrk="0" algn="ctr" indent="0" marL="0">
               <a:buNone/>
             </a:pPr>
             <a:r>
@@ -14197,7 +14197,7 @@
           <a:bodyPr wrap="square" lIns="0" tIns="0" rIns="0" bIns="0" rtlCol="0" anchor="ctr"/>
           <a:lstStyle/>
           <a:p>
-            <a:pPr algn="ctr" indent="0" marL="0">
+            <a:pPr eaLnBrk="0" algn="ctr" indent="0" marL="0">
               <a:buNone/>
             </a:pPr>
             <a:r>
@@ -14259,7 +14259,7 @@
           <a:bodyPr wrap="square" lIns="0" tIns="0" rIns="0" bIns="0" rtlCol="0" anchor="ctr"/>
           <a:lstStyle/>
           <a:p>
-            <a:pPr algn="ctr" indent="0" marL="0">
+            <a:pPr eaLnBrk="0" algn="ctr" indent="0" marL="0">
               <a:buNone/>
             </a:pPr>
             <a:r>
@@ -14298,7 +14298,7 @@
           <a:bodyPr wrap="square" lIns="0" tIns="0" rIns="0" bIns="0" rtlCol="0" anchor="ctr"/>
           <a:lstStyle/>
           <a:p>
-            <a:pPr algn="ctr" indent="0" marL="0">
+            <a:pPr eaLnBrk="0" algn="ctr" indent="0" marL="0">
               <a:buNone/>
             </a:pPr>
             <a:r>
@@ -14337,7 +14337,7 @@
           <a:bodyPr wrap="square" lIns="0" tIns="0" rIns="0" bIns="0" rtlCol="0" anchor="ctr"/>
           <a:lstStyle/>
           <a:p>
-            <a:pPr algn="ctr" indent="0" marL="0">
+            <a:pPr eaLnBrk="0" algn="ctr" indent="0" marL="0">
               <a:buNone/>
             </a:pPr>
             <a:r>
@@ -14399,7 +14399,7 @@
           <a:bodyPr wrap="square" lIns="0" tIns="0" rIns="0" bIns="0" rtlCol="0" anchor="ctr"/>
           <a:lstStyle/>
           <a:p>
-            <a:pPr algn="ctr" indent="0" marL="0">
+            <a:pPr eaLnBrk="0" algn="ctr" indent="0" marL="0">
               <a:buNone/>
             </a:pPr>
             <a:r>
@@ -14465,7 +14465,7 @@
           <a:bodyPr wrap="square" lIns="0" tIns="0" rIns="0" bIns="0" rtlCol="0" anchor="ctr"/>
           <a:lstStyle/>
           <a:p>
-            <a:pPr indent="0" marL="0">
+            <a:pPr eaLnBrk="0" indent="0" marL="0">
               <a:spcAft>
                 <a:spcPts val="600"/>
               </a:spcAft>
@@ -14525,7 +14525,7 @@
             </a:lvl1pPr>
           </a:lstStyle>
           <a:p>
-            <a:pPr algn="r"/>
+            <a:pPr eaLnBrk="0" algn="r"/>
             <a:fld id="{F7021451-1387-4CA6-816F-3879F97B5CBC}" type="slidenum">
               <a:rPr b="0" lang="en-US"/>
               <a:t>6</a:t>
@@ -14582,7 +14582,7 @@
           <a:bodyPr wrap="square" lIns="0" tIns="0" rIns="0" bIns="0" rtlCol="0" anchor="ctr"/>
           <a:lstStyle/>
           <a:p>
-            <a:pPr algn="l" indent="0" marL="0">
+            <a:pPr eaLnBrk="0" algn="l" indent="0" marL="0">
               <a:buNone/>
             </a:pPr>
             <a:r>
@@ -14698,7 +14698,7 @@
           <a:bodyPr wrap="square" lIns="0" tIns="0" rIns="0" bIns="0" rtlCol="0" anchor="ctr"/>
           <a:lstStyle/>
           <a:p>
-            <a:pPr algn="l" indent="0" marL="0">
+            <a:pPr eaLnBrk="0" algn="l" indent="0" marL="0">
               <a:buNone/>
             </a:pPr>
             <a:r>
@@ -14864,7 +14864,7 @@
           <a:bodyPr wrap="square" lIns="0" tIns="0" rIns="0" bIns="0" rtlCol="0" anchor="ctr"/>
           <a:lstStyle/>
           <a:p>
-            <a:pPr algn="ctr" indent="0" marL="0">
+            <a:pPr eaLnBrk="0" algn="ctr" indent="0" marL="0">
               <a:buNone/>
             </a:pPr>
             <a:r>
@@ -14926,7 +14926,7 @@
           <a:bodyPr wrap="square" lIns="0" tIns="0" rIns="0" bIns="0" rtlCol="0" anchor="ctr"/>
           <a:lstStyle/>
           <a:p>
-            <a:pPr algn="ctr" indent="0" marL="0">
+            <a:pPr eaLnBrk="0" algn="ctr" indent="0" marL="0">
               <a:buNone/>
             </a:pPr>
             <a:r>
@@ -14965,7 +14965,7 @@
           <a:bodyPr wrap="square" lIns="0" tIns="0" rIns="0" bIns="0" rtlCol="0" anchor="ctr"/>
           <a:lstStyle/>
           <a:p>
-            <a:pPr algn="ctr" indent="0" marL="0">
+            <a:pPr eaLnBrk="0" algn="ctr" indent="0" marL="0">
               <a:buNone/>
             </a:pPr>
             <a:r>
@@ -15004,7 +15004,7 @@
           <a:bodyPr wrap="square" lIns="0" tIns="0" rIns="0" bIns="0" rtlCol="0" anchor="ctr"/>
           <a:lstStyle/>
           <a:p>
-            <a:pPr algn="ctr" indent="0" marL="0">
+            <a:pPr eaLnBrk="0" algn="ctr" indent="0" marL="0">
               <a:buNone/>
             </a:pPr>
             <a:r>
@@ -15066,7 +15066,7 @@
           <a:bodyPr wrap="square" lIns="0" tIns="0" rIns="0" bIns="0" rtlCol="0" anchor="ctr"/>
           <a:lstStyle/>
           <a:p>
-            <a:pPr algn="ctr" indent="0" marL="0">
+            <a:pPr eaLnBrk="0" algn="ctr" indent="0" marL="0">
               <a:buNone/>
             </a:pPr>
             <a:r>
@@ -15129,7 +15129,7 @@
           <a:bodyPr wrap="square" lIns="0" tIns="0" rIns="0" bIns="0" rtlCol="0" anchor="ctr"/>
           <a:lstStyle/>
           <a:p>
-            <a:pPr algn="ctr" indent="0" marL="0">
+            <a:pPr eaLnBrk="0" algn="ctr" indent="0" marL="0">
               <a:buNone/>
             </a:pPr>
             <a:r>
@@ -15192,7 +15192,7 @@
           <a:bodyPr wrap="square" lIns="0" tIns="0" rIns="0" bIns="0" rtlCol="0" anchor="ctr"/>
           <a:lstStyle/>
           <a:p>
-            <a:pPr algn="ctr" indent="0" marL="0">
+            <a:pPr eaLnBrk="0" algn="ctr" indent="0" marL="0">
               <a:buNone/>
             </a:pPr>
             <a:r>
@@ -15231,7 +15231,7 @@
           <a:bodyPr wrap="square" lIns="0" tIns="0" rIns="0" bIns="0" rtlCol="0" anchor="ctr"/>
           <a:lstStyle/>
           <a:p>
-            <a:pPr algn="ctr" indent="0" marL="0">
+            <a:pPr eaLnBrk="0" algn="ctr" indent="0" marL="0">
               <a:buNone/>
             </a:pPr>
             <a:r>
@@ -15293,7 +15293,7 @@
           <a:bodyPr wrap="square" lIns="0" tIns="0" rIns="0" bIns="0" rtlCol="0" anchor="ctr"/>
           <a:lstStyle/>
           <a:p>
-            <a:pPr algn="ctr" indent="0" marL="0">
+            <a:pPr eaLnBrk="0" algn="ctr" indent="0" marL="0">
               <a:buNone/>
             </a:pPr>
             <a:r>
@@ -15332,7 +15332,7 @@
           <a:bodyPr wrap="square" lIns="0" tIns="0" rIns="0" bIns="0" rtlCol="0" anchor="ctr"/>
           <a:lstStyle/>
           <a:p>
-            <a:pPr algn="ctr" indent="0" marL="0">
+            <a:pPr eaLnBrk="0" algn="ctr" indent="0" marL="0">
               <a:buNone/>
             </a:pPr>
             <a:r>
@@ -15371,7 +15371,7 @@
           <a:bodyPr wrap="square" lIns="0" tIns="0" rIns="0" bIns="0" rtlCol="0" anchor="ctr"/>
           <a:lstStyle/>
           <a:p>
-            <a:pPr algn="ctr" indent="0" marL="0">
+            <a:pPr eaLnBrk="0" algn="ctr" indent="0" marL="0">
               <a:buNone/>
             </a:pPr>
             <a:r>
@@ -15433,7 +15433,7 @@
           <a:bodyPr wrap="square" lIns="0" tIns="0" rIns="0" bIns="0" rtlCol="0" anchor="ctr"/>
           <a:lstStyle/>
           <a:p>
-            <a:pPr algn="ctr" indent="0" marL="0">
+            <a:pPr eaLnBrk="0" algn="ctr" indent="0" marL="0">
               <a:buNone/>
             </a:pPr>
             <a:r>
@@ -15496,7 +15496,7 @@
           <a:bodyPr wrap="square" lIns="0" tIns="0" rIns="0" bIns="0" rtlCol="0" anchor="ctr"/>
           <a:lstStyle/>
           <a:p>
-            <a:pPr algn="ctr" indent="0" marL="0">
+            <a:pPr eaLnBrk="0" algn="ctr" indent="0" marL="0">
               <a:buNone/>
             </a:pPr>
             <a:r>
@@ -15559,7 +15559,7 @@
           <a:bodyPr wrap="square" lIns="0" tIns="0" rIns="0" bIns="0" rtlCol="0" anchor="ctr"/>
           <a:lstStyle/>
           <a:p>
-            <a:pPr algn="ctr" indent="0" marL="0">
+            <a:pPr eaLnBrk="0" algn="ctr" indent="0" marL="0">
               <a:buNone/>
             </a:pPr>
             <a:r>
@@ -15625,7 +15625,7 @@
           <a:bodyPr wrap="square" lIns="0" tIns="0" rIns="0" bIns="0" rtlCol="0" anchor="ctr"/>
           <a:lstStyle/>
           <a:p>
-            <a:pPr indent="0" marL="0">
+            <a:pPr eaLnBrk="0" indent="0" marL="0">
               <a:spcAft>
                 <a:spcPts val="600"/>
               </a:spcAft>
@@ -15667,7 +15667,7 @@
           <a:bodyPr wrap="square" lIns="0" tIns="0" rIns="0" bIns="0" rtlCol="0" anchor="ctr"/>
           <a:lstStyle/>
           <a:p>
-            <a:pPr algn="l" indent="0" marL="0">
+            <a:pPr eaLnBrk="0" algn="l" indent="0" marL="0">
               <a:buNone/>
             </a:pPr>
             <a:r>
@@ -15724,7 +15724,7 @@
             </a:lvl1pPr>
           </a:lstStyle>
           <a:p>
-            <a:pPr algn="r"/>
+            <a:pPr eaLnBrk="0" algn="r"/>
             <a:fld id="{F7021451-1387-4CA6-816F-3879F97B5CBC}" type="slidenum">
               <a:rPr b="0" lang="en-US"/>
               <a:t>7</a:t>
@@ -15781,7 +15781,7 @@
           <a:bodyPr wrap="square" lIns="0" tIns="0" rIns="0" bIns="0" rtlCol="0" anchor="ctr"/>
           <a:lstStyle/>
           <a:p>
-            <a:pPr algn="l" indent="0" marL="0">
+            <a:pPr eaLnBrk="0" algn="l" indent="0" marL="0">
               <a:buNone/>
             </a:pPr>
             <a:r>
@@ -16047,7 +16047,7 @@
           <a:bodyPr wrap="square" lIns="0" tIns="0" rIns="0" bIns="0" rtlCol="0" anchor="ctr"/>
           <a:lstStyle/>
           <a:p>
-            <a:pPr algn="l" indent="0" marL="0">
+            <a:pPr eaLnBrk="0" algn="l" indent="0" marL="0">
               <a:buNone/>
             </a:pPr>
             <a:r>
@@ -16213,7 +16213,7 @@
           <a:bodyPr wrap="square" lIns="0" tIns="0" rIns="0" bIns="0" rtlCol="0" anchor="ctr"/>
           <a:lstStyle/>
           <a:p>
-            <a:pPr algn="ctr" indent="0" marL="0">
+            <a:pPr eaLnBrk="0" algn="ctr" indent="0" marL="0">
               <a:buNone/>
             </a:pPr>
             <a:r>
@@ -16275,7 +16275,7 @@
           <a:bodyPr wrap="square" lIns="0" tIns="0" rIns="0" bIns="0" rtlCol="0" anchor="ctr"/>
           <a:lstStyle/>
           <a:p>
-            <a:pPr algn="ctr" indent="0" marL="0">
+            <a:pPr eaLnBrk="0" algn="ctr" indent="0" marL="0">
               <a:buNone/>
             </a:pPr>
             <a:r>
@@ -16314,7 +16314,7 @@
           <a:bodyPr wrap="square" lIns="0" tIns="0" rIns="0" bIns="0" rtlCol="0" anchor="ctr"/>
           <a:lstStyle/>
           <a:p>
-            <a:pPr algn="ctr" indent="0" marL="0">
+            <a:pPr eaLnBrk="0" algn="ctr" indent="0" marL="0">
               <a:buNone/>
             </a:pPr>
             <a:r>
@@ -16353,7 +16353,7 @@
           <a:bodyPr wrap="square" lIns="0" tIns="0" rIns="0" bIns="0" rtlCol="0" anchor="ctr"/>
           <a:lstStyle/>
           <a:p>
-            <a:pPr algn="ctr" indent="0" marL="0">
+            <a:pPr eaLnBrk="0" algn="ctr" indent="0" marL="0">
               <a:buNone/>
             </a:pPr>
             <a:r>
@@ -16415,7 +16415,7 @@
           <a:bodyPr wrap="square" lIns="0" tIns="0" rIns="0" bIns="0" rtlCol="0" anchor="ctr"/>
           <a:lstStyle/>
           <a:p>
-            <a:pPr algn="ctr" indent="0" marL="0">
+            <a:pPr eaLnBrk="0" algn="ctr" indent="0" marL="0">
               <a:buNone/>
             </a:pPr>
             <a:r>
@@ -16478,7 +16478,7 @@
           <a:bodyPr wrap="square" lIns="0" tIns="0" rIns="0" bIns="0" rtlCol="0" anchor="ctr"/>
           <a:lstStyle/>
           <a:p>
-            <a:pPr algn="ctr" indent="0" marL="0">
+            <a:pPr eaLnBrk="0" algn="ctr" indent="0" marL="0">
               <a:buNone/>
             </a:pPr>
             <a:r>
@@ -16541,7 +16541,7 @@
           <a:bodyPr wrap="square" lIns="0" tIns="0" rIns="0" bIns="0" rtlCol="0" anchor="ctr"/>
           <a:lstStyle/>
           <a:p>
-            <a:pPr algn="ctr" indent="0" marL="0">
+            <a:pPr eaLnBrk="0" algn="ctr" indent="0" marL="0">
               <a:buNone/>
             </a:pPr>
             <a:r>
@@ -16607,7 +16607,7 @@
           <a:bodyPr wrap="square" lIns="0" tIns="0" rIns="0" bIns="0" rtlCol="0" anchor="ctr"/>
           <a:lstStyle/>
           <a:p>
-            <a:pPr indent="0" marL="0">
+            <a:pPr eaLnBrk="0" indent="0" marL="0">
               <a:spcAft>
                 <a:spcPts val="600"/>
               </a:spcAft>
@@ -16657,7 +16657,7 @@
           <a:bodyPr wrap="square" lIns="177800" tIns="0" rIns="177800" bIns="0" rtlCol="0" anchor="ctr"/>
           <a:lstStyle/>
           <a:p>
-            <a:pPr algn="l" indent="0" marL="0">
+            <a:pPr eaLnBrk="0" algn="l" indent="0" marL="0">
               <a:buNone/>
             </a:pPr>
             <a:r>
@@ -16714,7 +16714,7 @@
             </a:lvl1pPr>
           </a:lstStyle>
           <a:p>
-            <a:pPr algn="r"/>
+            <a:pPr eaLnBrk="0" algn="r"/>
             <a:fld id="{F7021451-1387-4CA6-816F-3879F97B5CBC}" type="slidenum">
               <a:rPr b="0" lang="en-US"/>
               <a:t>8</a:t>
@@ -16771,7 +16771,7 @@
           <a:bodyPr wrap="square" lIns="0" tIns="0" rIns="0" bIns="0" rtlCol="0" anchor="ctr"/>
           <a:lstStyle/>
           <a:p>
-            <a:pPr algn="l" indent="0" marL="0">
+            <a:pPr eaLnBrk="0" algn="l" indent="0" marL="0">
               <a:buNone/>
             </a:pPr>
             <a:r>
@@ -16818,7 +16818,7 @@
           <a:bodyPr wrap="square" lIns="0" tIns="0" rIns="0" bIns="0" rtlCol="0" anchor="ctr"/>
           <a:lstStyle/>
           <a:p>
-            <a:pPr algn="ctr" indent="0" marL="0">
+            <a:pPr eaLnBrk="0" algn="ctr" indent="0" marL="0">
               <a:buNone/>
             </a:pPr>
             <a:r>
@@ -16857,7 +16857,7 @@
           <a:bodyPr wrap="square" lIns="0" tIns="0" rIns="0" bIns="0" rtlCol="0" anchor="ctr"/>
           <a:lstStyle/>
           <a:p>
-            <a:pPr algn="ctr" indent="0" marL="0">
+            <a:pPr eaLnBrk="0" algn="ctr" indent="0" marL="0">
               <a:buNone/>
             </a:pPr>
             <a:r>
@@ -16919,7 +16919,7 @@
           <a:bodyPr wrap="square" lIns="0" tIns="0" rIns="0" bIns="0" rtlCol="0" anchor="ctr"/>
           <a:lstStyle/>
           <a:p>
-            <a:pPr algn="ctr" indent="0" marL="0">
+            <a:pPr eaLnBrk="0" algn="ctr" indent="0" marL="0">
               <a:buNone/>
             </a:pPr>
             <a:r>
@@ -16958,7 +16958,7 @@
           <a:bodyPr wrap="square" lIns="0" tIns="0" rIns="0" bIns="0" rtlCol="0" anchor="ctr"/>
           <a:lstStyle/>
           <a:p>
-            <a:pPr algn="ctr" indent="0" marL="0">
+            <a:pPr eaLnBrk="0" algn="ctr" indent="0" marL="0">
               <a:buNone/>
             </a:pPr>
             <a:r>
@@ -17045,7 +17045,7 @@
           <a:bodyPr wrap="square" lIns="0" tIns="0" rIns="0" bIns="0" rtlCol="0" anchor="ctr"/>
           <a:lstStyle/>
           <a:p>
-            <a:pPr algn="ctr" indent="0" marL="0">
+            <a:pPr eaLnBrk="0" algn="ctr" indent="0" marL="0">
               <a:buNone/>
             </a:pPr>
             <a:r>
@@ -17092,7 +17092,7 @@
           <a:bodyPr wrap="square" lIns="0" tIns="0" rIns="0" bIns="0" rtlCol="0" anchor="ctr"/>
           <a:lstStyle/>
           <a:p>
-            <a:pPr algn="ctr" indent="0" marL="0">
+            <a:pPr eaLnBrk="0" algn="ctr" indent="0" marL="0">
               <a:buNone/>
             </a:pPr>
             <a:r>
@@ -17131,7 +17131,7 @@
           <a:bodyPr wrap="square" lIns="0" tIns="0" rIns="0" bIns="0" rtlCol="0" anchor="ctr"/>
           <a:lstStyle/>
           <a:p>
-            <a:pPr algn="ctr" indent="0" marL="0">
+            <a:pPr eaLnBrk="0" algn="ctr" indent="0" marL="0">
               <a:buNone/>
             </a:pPr>
             <a:r>
@@ -17193,7 +17193,7 @@
           <a:bodyPr wrap="square" lIns="0" tIns="0" rIns="0" bIns="0" rtlCol="0" anchor="ctr"/>
           <a:lstStyle/>
           <a:p>
-            <a:pPr algn="ctr" indent="0" marL="0">
+            <a:pPr eaLnBrk="0" algn="ctr" indent="0" marL="0">
               <a:buNone/>
             </a:pPr>
             <a:r>
@@ -17232,7 +17232,7 @@
           <a:bodyPr wrap="square" lIns="0" tIns="0" rIns="0" bIns="0" rtlCol="0" anchor="ctr"/>
           <a:lstStyle/>
           <a:p>
-            <a:pPr algn="ctr" indent="0" marL="0">
+            <a:pPr eaLnBrk="0" algn="ctr" indent="0" marL="0">
               <a:buNone/>
             </a:pPr>
             <a:r>
@@ -17271,7 +17271,7 @@
           <a:bodyPr wrap="square" lIns="0" tIns="0" rIns="0" bIns="0" rtlCol="0" anchor="ctr"/>
           <a:lstStyle/>
           <a:p>
-            <a:pPr algn="ctr" indent="0" marL="0">
+            <a:pPr eaLnBrk="0" algn="ctr" indent="0" marL="0">
               <a:buNone/>
             </a:pPr>
             <a:r>
@@ -17366,7 +17366,7 @@
           <a:bodyPr wrap="square" lIns="0" tIns="0" rIns="0" bIns="0" rtlCol="0" anchor="ctr"/>
           <a:lstStyle/>
           <a:p>
-            <a:pPr algn="ctr" indent="0" marL="0">
+            <a:pPr eaLnBrk="0" algn="ctr" indent="0" marL="0">
               <a:buNone/>
             </a:pPr>
             <a:r>
@@ -17405,7 +17405,7 @@
           <a:bodyPr wrap="square" lIns="0" tIns="0" rIns="0" bIns="0" rtlCol="0" anchor="ctr"/>
           <a:lstStyle/>
           <a:p>
-            <a:pPr algn="ctr" indent="0" marL="0">
+            <a:pPr eaLnBrk="0" algn="ctr" indent="0" marL="0">
               <a:buNone/>
             </a:pPr>
             <a:r>
@@ -17467,7 +17467,7 @@
           <a:bodyPr wrap="square" lIns="0" tIns="0" rIns="0" bIns="0" rtlCol="0" anchor="ctr"/>
           <a:lstStyle/>
           <a:p>
-            <a:pPr algn="ctr" indent="0" marL="0">
+            <a:pPr eaLnBrk="0" algn="ctr" indent="0" marL="0">
               <a:buNone/>
             </a:pPr>
             <a:r>
@@ -17506,7 +17506,7 @@
           <a:bodyPr wrap="square" lIns="0" tIns="0" rIns="0" bIns="0" rtlCol="0" anchor="ctr"/>
           <a:lstStyle/>
           <a:p>
-            <a:pPr algn="ctr" indent="0" marL="0">
+            <a:pPr eaLnBrk="0" algn="ctr" indent="0" marL="0">
               <a:buNone/>
             </a:pPr>
             <a:r>
@@ -17545,7 +17545,7 @@
           <a:bodyPr wrap="square" lIns="0" tIns="0" rIns="0" bIns="0" rtlCol="0" anchor="ctr"/>
           <a:lstStyle/>
           <a:p>
-            <a:pPr algn="ctr" indent="0" marL="0">
+            <a:pPr eaLnBrk="0" algn="ctr" indent="0" marL="0">
               <a:buNone/>
             </a:pPr>
             <a:r>
@@ -17659,7 +17659,7 @@
           <a:bodyPr wrap="square" lIns="0" tIns="0" rIns="0" bIns="0" rtlCol="0" anchor="t"/>
           <a:lstStyle/>
           <a:p>
-            <a:pPr indent="0" marL="0">
+            <a:pPr eaLnBrk="0" indent="0" marL="0">
               <a:spcAft>
                 <a:spcPts val="600"/>
               </a:spcAft>
@@ -17980,7 +17980,7 @@
           <a:bodyPr wrap="square" lIns="0" tIns="0" rIns="0" bIns="0" rtlCol="0" anchor="ctr"/>
           <a:lstStyle/>
           <a:p>
-            <a:pPr algn="l" indent="0" marL="0">
+            <a:pPr eaLnBrk="0" algn="l" indent="0" marL="0">
               <a:buNone/>
             </a:pPr>
             <a:r>
@@ -18027,7 +18027,7 @@
           <a:bodyPr wrap="square" lIns="177800" tIns="0" rIns="177800" bIns="0" rtlCol="0" anchor="ctr"/>
           <a:lstStyle/>
           <a:p>
-            <a:pPr algn="l" indent="0" marL="0">
+            <a:pPr eaLnBrk="0" algn="l" indent="0" marL="0">
               <a:buNone/>
             </a:pPr>
             <a:r>
@@ -18084,7 +18084,7 @@
             </a:lvl1pPr>
           </a:lstStyle>
           <a:p>
-            <a:pPr algn="r"/>
+            <a:pPr eaLnBrk="0" algn="r"/>
             <a:fld id="{F7021451-1387-4CA6-816F-3879F97B5CBC}" type="slidenum">
               <a:rPr b="0" lang="en-US"/>
               <a:t>9</a:t>

--- a/dist/초5/수학/분수의성질/초5_수학_분수의성질_01_크기가같은분수.pptx
+++ b/dist/초5/수학/분수의성질/초5_수학_분수의성질_01_크기가같은분수.pptx
@@ -121,13 +121,13 @@
   <p:extLst>
     <p:ext uri="{521415D9-36F7-43E2-AB2F-B90AF26B5E84}">
       <p14:sectionLst xmlns:p14="http://schemas.microsoft.com/office/powerpoint/2010/main">
-        <p14:section name="도입" id="{a59fa85c-99e6-a94e-fc0e-ec2b30eae6b4}">
+        <p14:section name="도입" id="{a17f72f6-e104-a518-3ce9-0c0b9f029515}">
           <p14:sldIdLst>
             <p14:sldId id="256"/>
             <p14:sldId id="257"/>
           </p14:sldIdLst>
         </p14:section>
-        <p14:section name="개념" id="{dc915966-6f39-f7dc-4327-c0d702f4f046}">
+        <p14:section name="개념" id="{d5523ec6-f678-0b47-083c-e00975474203}">
           <p14:sldIdLst>
             <p14:sldId id="258"/>
             <p14:sldId id="259"/>
@@ -137,25 +137,25 @@
             <p14:sldId id="263"/>
           </p14:sldIdLst>
         </p14:section>
-        <p14:section name="연습" id="{a8972c97-b3a5-fda1-c7c5-d9bab8e91322}">
+        <p14:section name="연습" id="{51af747d-3933-b0d6-dd7b-58b91903801a}">
           <p14:sldIdLst>
             <p14:sldId id="264"/>
             <p14:sldId id="265"/>
           </p14:sldIdLst>
         </p14:section>
-        <p14:section name="확인" id="{308e7c74-ae3f-425f-d797-2ab4ffe2fed1}">
+        <p14:section name="확인" id="{457ce177-66a8-8a01-a9c8-5760d8c4fc54}">
           <p14:sldIdLst>
             <p14:sldId id="266"/>
             <p14:sldId id="267"/>
             <p14:sldId id="268"/>
           </p14:sldIdLst>
         </p14:section>
-        <p14:section name="정리" id="{74edaaec-b353-ff61-f699-f714b29df0d6}">
+        <p14:section name="정리" id="{2f8e0dfe-febe-6172-6474-2df26ae8389b}">
           <p14:sldIdLst>
             <p14:sldId id="269"/>
           </p14:sldIdLst>
         </p14:section>
-        <p14:section name="보충" id="{ddf2b40e-2ed8-1479-9872-6ee8d6a9f497}">
+        <p14:section name="보충" id="{b739a3af-7e0b-d4a0-9b15-d0fcc8f1f798}">
           <p14:sldIdLst>
             <p14:sldId id="270"/>
           </p14:sldIdLst>
@@ -3252,7 +3252,7 @@
         <p:spPr>
           <a:xfrm>
             <a:off x="8609076" y="1371600"/>
-            <a:ext cx="896112" cy="1871472"/>
+            <a:ext cx="1033272" cy="1871472"/>
           </a:xfrm>
           <a:prstGeom prst="rect">
             <a:avLst/>
@@ -3290,7 +3290,7 @@
         </p:nvSpPr>
         <p:spPr>
           <a:xfrm>
-            <a:off x="9614916" y="1371600"/>
+            <a:off x="9752076" y="1371600"/>
             <a:ext cx="909828" cy="899160"/>
           </a:xfrm>
           <a:prstGeom prst="rect">
@@ -3329,7 +3329,7 @@
         </p:nvSpPr>
         <p:spPr>
           <a:xfrm>
-            <a:off x="9651492" y="2307336"/>
+            <a:off x="9788652" y="2307336"/>
             <a:ext cx="836676" cy="0"/>
           </a:xfrm>
           <a:prstGeom prst="line">
@@ -3352,7 +3352,7 @@
         </p:nvSpPr>
         <p:spPr>
           <a:xfrm>
-            <a:off x="9614916" y="2343912"/>
+            <a:off x="9752076" y="2343912"/>
             <a:ext cx="909828" cy="899160"/>
           </a:xfrm>
           <a:prstGeom prst="rect">
@@ -15632,7 +15632,7 @@
               <a:buNone/>
             </a:pPr>
             <a:r>
-              <a:rPr lang="ko-KR" altLang="en-US" sz="2800" dirty="0">
+              <a:rPr lang="ko-KR" altLang="en-US" sz="2200" dirty="0">
                 <a:solidFill>
                   <a:srgbClr val="1F2937"/>
                 </a:solidFill>
@@ -15642,7 +15642,7 @@
               </a:rPr>
               <a:t>분자와 분모에 0이 아닌 같은 수를 곱하면 크기가 같은 분수가 돼요.</a:t>
             </a:r>
-            <a:endParaRPr lang="ko-KR" sz="2800" dirty="0"/>
+            <a:endParaRPr lang="ko-KR" sz="2200" dirty="0"/>
           </a:p>
         </p:txBody>
       </p:sp>
